--- a/Docs/Projet_final.pptx
+++ b/Docs/Projet_final.pptx
@@ -3642,7 +3642,7 @@
         <p:spPr>
           <a:xfrm>
             <a:off x="6807112" y="0"/>
-            <a:ext cx="5384888" cy="6350000"/>
+            <a:ext cx="5384888" cy="6302523"/>
           </a:xfrm>
           <a:prstGeom prst="rect">
             <a:avLst/>
@@ -5271,16 +5271,7 @@
                 </a:solidFill>
                 <a:effectLst/>
               </a:rPr>
-              <a:t>Transmission longue portée via </a:t>
-            </a:r>
-            <a:r>
-              <a:rPr lang="fr-FR" b="0" i="0" dirty="0" err="1">
-                <a:solidFill>
-                  <a:schemeClr val="tx2"/>
-                </a:solidFill>
-                <a:effectLst/>
-              </a:rPr>
-              <a:t>LoRaWAN</a:t>
+              <a:t>Transmission longue portée via LoRa</a:t>
             </a:r>
             <a:endParaRPr lang="fr-FR" dirty="0">
               <a:solidFill>
@@ -5303,7 +5294,7 @@
                 </a:solidFill>
                 <a:effectLst/>
               </a:rPr>
-              <a:t>Alertes locales via Bluetooth</a:t>
+              <a:t>Alertes locales via BLE</a:t>
             </a:r>
             <a:endParaRPr lang="fr-FR" dirty="0">
               <a:solidFill>
@@ -5654,6 +5645,285 @@
                       </p:childTnLst>
                     </p:cTn>
                   </p:par>
+                  <p:par>
+                    <p:cTn id="15" fill="hold">
+                      <p:stCondLst>
+                        <p:cond delay="indefinite"/>
+                      </p:stCondLst>
+                      <p:childTnLst>
+                        <p:par>
+                          <p:cTn id="16" fill="hold">
+                            <p:stCondLst>
+                              <p:cond delay="0"/>
+                            </p:stCondLst>
+                            <p:childTnLst>
+                              <p:par>
+                                <p:cTn id="17" presetID="42" presetClass="entr" presetSubtype="0" fill="hold" grpId="0" nodeType="clickEffect">
+                                  <p:stCondLst>
+                                    <p:cond delay="0"/>
+                                  </p:stCondLst>
+                                  <p:childTnLst>
+                                    <p:set>
+                                      <p:cBhvr>
+                                        <p:cTn id="18" dur="1" fill="hold">
+                                          <p:stCondLst>
+                                            <p:cond delay="0"/>
+                                          </p:stCondLst>
+                                        </p:cTn>
+                                        <p:tgtEl>
+                                          <p:spTgt spid="12"/>
+                                        </p:tgtEl>
+                                        <p:attrNameLst>
+                                          <p:attrName>style.visibility</p:attrName>
+                                        </p:attrNameLst>
+                                      </p:cBhvr>
+                                      <p:to>
+                                        <p:strVal val="visible"/>
+                                      </p:to>
+                                    </p:set>
+                                    <p:animEffect transition="in" filter="fade">
+                                      <p:cBhvr>
+                                        <p:cTn id="19" dur="1000"/>
+                                        <p:tgtEl>
+                                          <p:spTgt spid="12"/>
+                                        </p:tgtEl>
+                                      </p:cBhvr>
+                                    </p:animEffect>
+                                    <p:anim calcmode="lin" valueType="num">
+                                      <p:cBhvr>
+                                        <p:cTn id="20" dur="1000" fill="hold"/>
+                                        <p:tgtEl>
+                                          <p:spTgt spid="12"/>
+                                        </p:tgtEl>
+                                        <p:attrNameLst>
+                                          <p:attrName>ppt_x</p:attrName>
+                                        </p:attrNameLst>
+                                      </p:cBhvr>
+                                      <p:tavLst>
+                                        <p:tav tm="0">
+                                          <p:val>
+                                            <p:strVal val="#ppt_x"/>
+                                          </p:val>
+                                        </p:tav>
+                                        <p:tav tm="100000">
+                                          <p:val>
+                                            <p:strVal val="#ppt_x"/>
+                                          </p:val>
+                                        </p:tav>
+                                      </p:tavLst>
+                                    </p:anim>
+                                    <p:anim calcmode="lin" valueType="num">
+                                      <p:cBhvr>
+                                        <p:cTn id="21" dur="1000" fill="hold"/>
+                                        <p:tgtEl>
+                                          <p:spTgt spid="12"/>
+                                        </p:tgtEl>
+                                        <p:attrNameLst>
+                                          <p:attrName>ppt_y</p:attrName>
+                                        </p:attrNameLst>
+                                      </p:cBhvr>
+                                      <p:tavLst>
+                                        <p:tav tm="0">
+                                          <p:val>
+                                            <p:strVal val="#ppt_y+.1"/>
+                                          </p:val>
+                                        </p:tav>
+                                        <p:tav tm="100000">
+                                          <p:val>
+                                            <p:strVal val="#ppt_y"/>
+                                          </p:val>
+                                        </p:tav>
+                                      </p:tavLst>
+                                    </p:anim>
+                                  </p:childTnLst>
+                                </p:cTn>
+                              </p:par>
+                            </p:childTnLst>
+                          </p:cTn>
+                        </p:par>
+                      </p:childTnLst>
+                    </p:cTn>
+                  </p:par>
+                  <p:par>
+                    <p:cTn id="22" fill="hold">
+                      <p:stCondLst>
+                        <p:cond delay="indefinite"/>
+                      </p:stCondLst>
+                      <p:childTnLst>
+                        <p:par>
+                          <p:cTn id="23" fill="hold">
+                            <p:stCondLst>
+                              <p:cond delay="0"/>
+                            </p:stCondLst>
+                            <p:childTnLst>
+                              <p:par>
+                                <p:cTn id="24" presetID="42" presetClass="entr" presetSubtype="0" fill="hold" grpId="0" nodeType="clickEffect">
+                                  <p:stCondLst>
+                                    <p:cond delay="0"/>
+                                  </p:stCondLst>
+                                  <p:childTnLst>
+                                    <p:set>
+                                      <p:cBhvr>
+                                        <p:cTn id="25" dur="1" fill="hold">
+                                          <p:stCondLst>
+                                            <p:cond delay="0"/>
+                                          </p:stCondLst>
+                                        </p:cTn>
+                                        <p:tgtEl>
+                                          <p:spTgt spid="10"/>
+                                        </p:tgtEl>
+                                        <p:attrNameLst>
+                                          <p:attrName>style.visibility</p:attrName>
+                                        </p:attrNameLst>
+                                      </p:cBhvr>
+                                      <p:to>
+                                        <p:strVal val="visible"/>
+                                      </p:to>
+                                    </p:set>
+                                    <p:animEffect transition="in" filter="fade">
+                                      <p:cBhvr>
+                                        <p:cTn id="26" dur="1000"/>
+                                        <p:tgtEl>
+                                          <p:spTgt spid="10"/>
+                                        </p:tgtEl>
+                                      </p:cBhvr>
+                                    </p:animEffect>
+                                    <p:anim calcmode="lin" valueType="num">
+                                      <p:cBhvr>
+                                        <p:cTn id="27" dur="1000" fill="hold"/>
+                                        <p:tgtEl>
+                                          <p:spTgt spid="10"/>
+                                        </p:tgtEl>
+                                        <p:attrNameLst>
+                                          <p:attrName>ppt_x</p:attrName>
+                                        </p:attrNameLst>
+                                      </p:cBhvr>
+                                      <p:tavLst>
+                                        <p:tav tm="0">
+                                          <p:val>
+                                            <p:strVal val="#ppt_x"/>
+                                          </p:val>
+                                        </p:tav>
+                                        <p:tav tm="100000">
+                                          <p:val>
+                                            <p:strVal val="#ppt_x"/>
+                                          </p:val>
+                                        </p:tav>
+                                      </p:tavLst>
+                                    </p:anim>
+                                    <p:anim calcmode="lin" valueType="num">
+                                      <p:cBhvr>
+                                        <p:cTn id="28" dur="1000" fill="hold"/>
+                                        <p:tgtEl>
+                                          <p:spTgt spid="10"/>
+                                        </p:tgtEl>
+                                        <p:attrNameLst>
+                                          <p:attrName>ppt_y</p:attrName>
+                                        </p:attrNameLst>
+                                      </p:cBhvr>
+                                      <p:tavLst>
+                                        <p:tav tm="0">
+                                          <p:val>
+                                            <p:strVal val="#ppt_y+.1"/>
+                                          </p:val>
+                                        </p:tav>
+                                        <p:tav tm="100000">
+                                          <p:val>
+                                            <p:strVal val="#ppt_y"/>
+                                          </p:val>
+                                        </p:tav>
+                                      </p:tavLst>
+                                    </p:anim>
+                                  </p:childTnLst>
+                                </p:cTn>
+                              </p:par>
+                              <p:par>
+                                <p:cTn id="29" presetID="42" presetClass="entr" presetSubtype="0" fill="hold" grpId="0" nodeType="withEffect">
+                                  <p:stCondLst>
+                                    <p:cond delay="0"/>
+                                  </p:stCondLst>
+                                  <p:childTnLst>
+                                    <p:set>
+                                      <p:cBhvr>
+                                        <p:cTn id="30" dur="1" fill="hold">
+                                          <p:stCondLst>
+                                            <p:cond delay="0"/>
+                                          </p:stCondLst>
+                                        </p:cTn>
+                                        <p:tgtEl>
+                                          <p:spTgt spid="7"/>
+                                        </p:tgtEl>
+                                        <p:attrNameLst>
+                                          <p:attrName>style.visibility</p:attrName>
+                                        </p:attrNameLst>
+                                      </p:cBhvr>
+                                      <p:to>
+                                        <p:strVal val="visible"/>
+                                      </p:to>
+                                    </p:set>
+                                    <p:animEffect transition="in" filter="fade">
+                                      <p:cBhvr>
+                                        <p:cTn id="31" dur="1000"/>
+                                        <p:tgtEl>
+                                          <p:spTgt spid="7"/>
+                                        </p:tgtEl>
+                                      </p:cBhvr>
+                                    </p:animEffect>
+                                    <p:anim calcmode="lin" valueType="num">
+                                      <p:cBhvr>
+                                        <p:cTn id="32" dur="1000" fill="hold"/>
+                                        <p:tgtEl>
+                                          <p:spTgt spid="7"/>
+                                        </p:tgtEl>
+                                        <p:attrNameLst>
+                                          <p:attrName>ppt_x</p:attrName>
+                                        </p:attrNameLst>
+                                      </p:cBhvr>
+                                      <p:tavLst>
+                                        <p:tav tm="0">
+                                          <p:val>
+                                            <p:strVal val="#ppt_x"/>
+                                          </p:val>
+                                        </p:tav>
+                                        <p:tav tm="100000">
+                                          <p:val>
+                                            <p:strVal val="#ppt_x"/>
+                                          </p:val>
+                                        </p:tav>
+                                      </p:tavLst>
+                                    </p:anim>
+                                    <p:anim calcmode="lin" valueType="num">
+                                      <p:cBhvr>
+                                        <p:cTn id="33" dur="1000" fill="hold"/>
+                                        <p:tgtEl>
+                                          <p:spTgt spid="7"/>
+                                        </p:tgtEl>
+                                        <p:attrNameLst>
+                                          <p:attrName>ppt_y</p:attrName>
+                                        </p:attrNameLst>
+                                      </p:cBhvr>
+                                      <p:tavLst>
+                                        <p:tav tm="0">
+                                          <p:val>
+                                            <p:strVal val="#ppt_y+.1"/>
+                                          </p:val>
+                                        </p:tav>
+                                        <p:tav tm="100000">
+                                          <p:val>
+                                            <p:strVal val="#ppt_y"/>
+                                          </p:val>
+                                        </p:tav>
+                                      </p:tavLst>
+                                    </p:anim>
+                                  </p:childTnLst>
+                                </p:cTn>
+                              </p:par>
+                            </p:childTnLst>
+                          </p:cTn>
+                        </p:par>
+                      </p:childTnLst>
+                    </p:cTn>
+                  </p:par>
                 </p:childTnLst>
               </p:cTn>
               <p:prevCondLst>
@@ -5677,6 +5947,9 @@
     </p:tnLst>
     <p:bldLst>
       <p:bldP spid="3" grpId="0"/>
+      <p:bldP spid="7" grpId="0"/>
+      <p:bldP spid="10" grpId="0"/>
+      <p:bldP spid="12" grpId="0"/>
     </p:bldLst>
   </p:timing>
 </p:sld>
@@ -7212,6 +7485,142 @@
   <p:clrMapOvr>
     <a:masterClrMapping/>
   </p:clrMapOvr>
+  <p:timing>
+    <p:tnLst>
+      <p:par>
+        <p:cTn id="1" dur="indefinite" restart="never" nodeType="tmRoot">
+          <p:childTnLst>
+            <p:seq concurrent="1" nextAc="seek">
+              <p:cTn id="2" dur="indefinite" nodeType="mainSeq">
+                <p:childTnLst>
+                  <p:par>
+                    <p:cTn id="3" fill="hold">
+                      <p:stCondLst>
+                        <p:cond delay="indefinite"/>
+                      </p:stCondLst>
+                      <p:childTnLst>
+                        <p:par>
+                          <p:cTn id="4" fill="hold">
+                            <p:stCondLst>
+                              <p:cond delay="0"/>
+                            </p:stCondLst>
+                            <p:childTnLst>
+                              <p:par>
+                                <p:cTn id="5" presetID="14" presetClass="entr" presetSubtype="10" fill="hold" nodeType="clickEffect">
+                                  <p:stCondLst>
+                                    <p:cond delay="0"/>
+                                  </p:stCondLst>
+                                  <p:childTnLst>
+                                    <p:set>
+                                      <p:cBhvr>
+                                        <p:cTn id="6" dur="1" fill="hold">
+                                          <p:stCondLst>
+                                            <p:cond delay="0"/>
+                                          </p:stCondLst>
+                                        </p:cTn>
+                                        <p:tgtEl>
+                                          <p:spTgt spid="21"/>
+                                        </p:tgtEl>
+                                        <p:attrNameLst>
+                                          <p:attrName>style.visibility</p:attrName>
+                                        </p:attrNameLst>
+                                      </p:cBhvr>
+                                      <p:to>
+                                        <p:strVal val="visible"/>
+                                      </p:to>
+                                    </p:set>
+                                    <p:animEffect transition="in" filter="randombar(horizontal)">
+                                      <p:cBhvr>
+                                        <p:cTn id="7" dur="500"/>
+                                        <p:tgtEl>
+                                          <p:spTgt spid="21"/>
+                                        </p:tgtEl>
+                                      </p:cBhvr>
+                                    </p:animEffect>
+                                  </p:childTnLst>
+                                </p:cTn>
+                              </p:par>
+                            </p:childTnLst>
+                          </p:cTn>
+                        </p:par>
+                      </p:childTnLst>
+                    </p:cTn>
+                  </p:par>
+                  <p:par>
+                    <p:cTn id="8" fill="hold">
+                      <p:stCondLst>
+                        <p:cond delay="indefinite"/>
+                      </p:stCondLst>
+                      <p:childTnLst>
+                        <p:par>
+                          <p:cTn id="9" fill="hold">
+                            <p:stCondLst>
+                              <p:cond delay="0"/>
+                            </p:stCondLst>
+                            <p:childTnLst>
+                              <p:par>
+                                <p:cTn id="10" presetID="14" presetClass="entr" presetSubtype="10" fill="hold" nodeType="clickEffect">
+                                  <p:stCondLst>
+                                    <p:cond delay="0"/>
+                                  </p:stCondLst>
+                                  <p:childTnLst>
+                                    <p:set>
+                                      <p:cBhvr>
+                                        <p:cTn id="11" dur="1" fill="hold">
+                                          <p:stCondLst>
+                                            <p:cond delay="0"/>
+                                          </p:stCondLst>
+                                        </p:cTn>
+                                        <p:tgtEl>
+                                          <p:spTgt spid="30"/>
+                                        </p:tgtEl>
+                                        <p:attrNameLst>
+                                          <p:attrName>style.visibility</p:attrName>
+                                        </p:attrNameLst>
+                                      </p:cBhvr>
+                                      <p:to>
+                                        <p:strVal val="visible"/>
+                                      </p:to>
+                                    </p:set>
+                                    <p:animEffect transition="in" filter="randombar(horizontal)">
+                                      <p:cBhvr>
+                                        <p:cTn id="12" dur="500"/>
+                                        <p:tgtEl>
+                                          <p:spTgt spid="30"/>
+                                        </p:tgtEl>
+                                      </p:cBhvr>
+                                    </p:animEffect>
+                                  </p:childTnLst>
+                                </p:cTn>
+                              </p:par>
+                            </p:childTnLst>
+                          </p:cTn>
+                        </p:par>
+                      </p:childTnLst>
+                    </p:cTn>
+                  </p:par>
+                </p:childTnLst>
+              </p:cTn>
+              <p:prevCondLst>
+                <p:cond evt="onPrev" delay="0">
+                  <p:tgtEl>
+                    <p:sldTgt/>
+                  </p:tgtEl>
+                </p:cond>
+              </p:prevCondLst>
+              <p:nextCondLst>
+                <p:cond evt="onNext" delay="0">
+                  <p:tgtEl>
+                    <p:sldTgt/>
+                  </p:tgtEl>
+                </p:cond>
+              </p:nextCondLst>
+            </p:seq>
+          </p:childTnLst>
+        </p:cTn>
+      </p:par>
+    </p:tnLst>
+  </p:timing>
 </p:sld>
 </file>
 
@@ -7385,8 +7794,8 @@
         </p:nvSpPr>
         <p:spPr bwMode="auto">
           <a:xfrm>
-            <a:off x="833120" y="1711526"/>
-            <a:ext cx="3986989" cy="2534027"/>
+            <a:off x="833120" y="1919275"/>
+            <a:ext cx="1655261" cy="2118529"/>
           </a:xfrm>
           <a:prstGeom prst="rect">
             <a:avLst/>
@@ -7586,35 +7995,6 @@
                 <a:latin typeface="Arial" panose="020B0604020202020204" pitchFamily="34" charset="0"/>
               </a:rPr>
               <a:t>LoRa</a:t>
-            </a:r>
-          </a:p>
-          <a:p>
-            <a:pPr marR="0" lvl="0" algn="l" defTabSz="914400" rtl="0" eaLnBrk="0" fontAlgn="base" latinLnBrk="0" hangingPunct="0">
-              <a:lnSpc>
-                <a:spcPct val="150000"/>
-              </a:lnSpc>
-              <a:spcBef>
-                <a:spcPct val="0"/>
-              </a:spcBef>
-              <a:spcAft>
-                <a:spcPct val="0"/>
-              </a:spcAft>
-              <a:buClrTx/>
-              <a:buSzTx/>
-              <a:tabLst/>
-            </a:pPr>
-            <a:r>
-              <a:rPr kumimoji="0" lang="fr-FR" altLang="fr-FR" sz="1800" b="0" i="0" u="none" strike="noStrike" cap="none" normalizeH="0" baseline="0" dirty="0">
-                <a:ln>
-                  <a:noFill/>
-                </a:ln>
-                <a:solidFill>
-                  <a:schemeClr val="tx2"/>
-                </a:solidFill>
-                <a:effectLst/>
-                <a:latin typeface="Arial" panose="020B0604020202020204" pitchFamily="34" charset="0"/>
-              </a:rPr>
-              <a:t>Encodage coordonnées (int32 × 1e6)</a:t>
             </a:r>
           </a:p>
         </p:txBody>
@@ -9943,6 +10323,15 @@
 </file>
 
 <file path=customXml/item1.xml><?xml version="1.0" encoding="utf-8"?>
+<?mso-contentType ?>
+<FormTemplates xmlns="http://schemas.microsoft.com/sharepoint/v3/contenttype/forms">
+  <Display>DocumentLibraryForm</Display>
+  <Edit>DocumentLibraryForm</Edit>
+  <New>DocumentLibraryForm</New>
+</FormTemplates>
+</file>
+
+<file path=customXml/item2.xml><?xml version="1.0" encoding="utf-8"?>
 <ct:contentTypeSchema xmlns:ct="http://schemas.microsoft.com/office/2006/metadata/contentType" xmlns:ma="http://schemas.microsoft.com/office/2006/metadata/properties/metaAttributes" ct:_="" ma:_="" ma:contentTypeName="Document" ma:contentTypeID="0x010100D1DBFDC516FB7D498F2708E0668661F7" ma:contentTypeVersion="15" ma:contentTypeDescription="Create a new document." ma:contentTypeScope="" ma:versionID="76190fd46b8ecc19c259073b19191ac1">
   <xsd:schema xmlns:xsd="http://www.w3.org/2001/XMLSchema" xmlns:xs="http://www.w3.org/2001/XMLSchema" xmlns:p="http://schemas.microsoft.com/office/2006/metadata/properties" xmlns:ns2="fd043017-6145-4171-ae53-4a2444b0f3a8" xmlns:ns3="ae4d9fed-4369-4efa-870f-7c4fbc625802" targetNamespace="http://schemas.microsoft.com/office/2006/metadata/properties" ma:root="true" ma:fieldsID="1923d3a5d954ca530e5d58ea92103f74" ns2:_="" ns3:_="">
     <xsd:import namespace="fd043017-6145-4171-ae53-4a2444b0f3a8"/>
@@ -10177,15 +10566,6 @@
 </ct:contentTypeSchema>
 </file>
 
-<file path=customXml/item2.xml><?xml version="1.0" encoding="utf-8"?>
-<?mso-contentType ?>
-<FormTemplates xmlns="http://schemas.microsoft.com/sharepoint/v3/contenttype/forms">
-  <Display>DocumentLibraryForm</Display>
-  <Edit>DocumentLibraryForm</Edit>
-  <New>DocumentLibraryForm</New>
-</FormTemplates>
-</file>
-
 <file path=customXml/item3.xml><?xml version="1.0" encoding="utf-8"?>
 <p:properties xmlns:p="http://schemas.microsoft.com/office/2006/metadata/properties" xmlns:xsi="http://www.w3.org/2001/XMLSchema-instance" xmlns:pc="http://schemas.microsoft.com/office/infopath/2007/PartnerControls">
   <documentManagement>
@@ -10198,6 +10578,14 @@
 </file>
 
 <file path=customXml/itemProps1.xml><?xml version="1.0" encoding="utf-8"?>
+<ds:datastoreItem xmlns:ds="http://schemas.openxmlformats.org/officeDocument/2006/customXml" ds:itemID="{90619B12-AFF5-4C5C-937B-0A7AB1969000}">
+  <ds:schemaRefs>
+    <ds:schemaRef ds:uri="http://schemas.microsoft.com/sharepoint/v3/contenttype/forms"/>
+  </ds:schemaRefs>
+</ds:datastoreItem>
+</file>
+
+<file path=customXml/itemProps2.xml><?xml version="1.0" encoding="utf-8"?>
 <ds:datastoreItem xmlns:ds="http://schemas.openxmlformats.org/officeDocument/2006/customXml" ds:itemID="{7FEA0324-74CB-4E11-A24D-EE3DF264393B}">
   <ds:schemaRefs>
     <ds:schemaRef ds:uri="http://schemas.microsoft.com/office/2006/metadata/contentType"/>
@@ -10212,14 +10600,6 @@
     <ds:schemaRef ds:uri="http://purl.org/dc/elements/1.1/"/>
     <ds:schemaRef ds:uri="http://purl.org/dc/terms/"/>
     <ds:schemaRef ds:uri="http://schemas.microsoft.com/internal/obd"/>
-  </ds:schemaRefs>
-</ds:datastoreItem>
-</file>
-
-<file path=customXml/itemProps2.xml><?xml version="1.0" encoding="utf-8"?>
-<ds:datastoreItem xmlns:ds="http://schemas.openxmlformats.org/officeDocument/2006/customXml" ds:itemID="{90619B12-AFF5-4C5C-937B-0A7AB1969000}">
-  <ds:schemaRefs>
-    <ds:schemaRef ds:uri="http://schemas.microsoft.com/sharepoint/v3/contenttype/forms"/>
   </ds:schemaRefs>
 </ds:datastoreItem>
 </file>

--- a/Docs/Projet_final.pptx
+++ b/Docs/Projet_final.pptx
@@ -238,7 +238,7 @@
           <a:p>
             <a:fld id="{240488B5-15B3-496A-A880-2DCC344E83BB}" type="datetimeFigureOut">
               <a:rPr lang="fr-FR" smtClean="0"/>
-              <a:t>24/02/2026</a:t>
+              <a:t>25/02/2026</a:t>
             </a:fld>
             <a:endParaRPr lang="fr-FR"/>
           </a:p>
@@ -415,7 +415,7 @@
           <a:p>
             <a:fld id="{3FE4E41A-B500-4E07-B0F6-B74CA4F34813}" type="datetimeFigureOut">
               <a:rPr lang="fr-FR" smtClean="0"/>
-              <a:t>24/02/2026</a:t>
+              <a:t>25/02/2026</a:t>
             </a:fld>
             <a:endParaRPr lang="fr-FR"/>
           </a:p>
@@ -6049,10 +6049,10 @@
         </p:nvGrpSpPr>
         <p:grpSpPr>
           <a:xfrm>
-            <a:off x="735081" y="1485072"/>
-            <a:ext cx="10204842" cy="3127475"/>
-            <a:chOff x="735081" y="958299"/>
-            <a:chExt cx="10204842" cy="3127475"/>
+            <a:off x="0" y="1510051"/>
+            <a:ext cx="12116766" cy="3154800"/>
+            <a:chOff x="735081" y="943949"/>
+            <a:chExt cx="12116766" cy="3154800"/>
           </a:xfrm>
         </p:grpSpPr>
         <p:sp>
@@ -6069,7 +6069,7 @@
           </p:nvSpPr>
           <p:spPr>
             <a:xfrm>
-              <a:off x="6269704" y="3716442"/>
+              <a:off x="6182166" y="3729417"/>
               <a:ext cx="2082153" cy="369332"/>
             </a:xfrm>
             <a:prstGeom prst="rect">
@@ -6107,10 +6107,10 @@
           </p:nvGrpSpPr>
           <p:grpSpPr>
             <a:xfrm>
-              <a:off x="735081" y="958299"/>
-              <a:ext cx="10204842" cy="2724701"/>
-              <a:chOff x="735081" y="958299"/>
-              <a:chExt cx="10204842" cy="2724701"/>
+              <a:off x="735081" y="943949"/>
+              <a:ext cx="12116766" cy="2739051"/>
+              <a:chOff x="735081" y="943949"/>
+              <a:chExt cx="12116766" cy="2739051"/>
             </a:xfrm>
           </p:grpSpPr>
           <p:grpSp>
@@ -6127,10 +6127,10 @@
             </p:nvGrpSpPr>
             <p:grpSpPr>
               <a:xfrm>
-                <a:off x="1098221" y="1277692"/>
-                <a:ext cx="9533338" cy="2405308"/>
-                <a:chOff x="1306942" y="1550680"/>
-                <a:chExt cx="9533338" cy="2405308"/>
+                <a:off x="1098221" y="1280844"/>
+                <a:ext cx="11422075" cy="2402156"/>
+                <a:chOff x="1306942" y="1553832"/>
+                <a:chExt cx="11422075" cy="2402156"/>
               </a:xfrm>
             </p:grpSpPr>
             <p:grpSp>
@@ -6147,10 +6147,10 @@
               </p:nvGrpSpPr>
               <p:grpSpPr>
                 <a:xfrm>
-                  <a:off x="1306942" y="1610607"/>
-                  <a:ext cx="9533338" cy="2345381"/>
-                  <a:chOff x="2211403" y="1133529"/>
-                  <a:chExt cx="9533338" cy="2345381"/>
+                  <a:off x="1306942" y="1599273"/>
+                  <a:ext cx="11422075" cy="2356715"/>
+                  <a:chOff x="2211403" y="1122195"/>
+                  <a:chExt cx="11422075" cy="2356715"/>
                 </a:xfrm>
               </p:grpSpPr>
               <p:grpSp>
@@ -6167,10 +6167,10 @@
                 </p:nvGrpSpPr>
                 <p:grpSpPr>
                   <a:xfrm>
-                    <a:off x="4999489" y="1133529"/>
-                    <a:ext cx="6745252" cy="1479578"/>
-                    <a:chOff x="5148576" y="376209"/>
-                    <a:chExt cx="6745252" cy="1479578"/>
+                    <a:off x="4999489" y="1122195"/>
+                    <a:ext cx="8633989" cy="1490912"/>
+                    <a:chOff x="5148576" y="364875"/>
+                    <a:chExt cx="8633989" cy="1490912"/>
                   </a:xfrm>
                 </p:grpSpPr>
                 <p:sp>
@@ -6312,17 +6312,8 @@
                         <a:rPr lang="fr-FR" dirty="0">
                           <a:latin typeface="Tenorite" panose="00000500000000000000" pitchFamily="2" charset="0"/>
                         </a:rPr>
-                        <a:t>Node-</a:t>
+                        <a:t>Satellite</a:t>
                       </a:r>
-                      <a:r>
-                        <a:rPr lang="fr-FR" dirty="0" err="1">
-                          <a:latin typeface="Tenorite" panose="00000500000000000000" pitchFamily="2" charset="0"/>
-                        </a:rPr>
-                        <a:t>red</a:t>
-                      </a:r>
-                      <a:endParaRPr lang="fr-FR" dirty="0">
-                        <a:latin typeface="Tenorite" panose="00000500000000000000" pitchFamily="2" charset="0"/>
-                      </a:endParaRPr>
                     </a:p>
                   </p:txBody>
                 </p:sp>
@@ -6337,15 +6328,15 @@
                     </p:cNvPr>
                     <p:cNvCxnSpPr>
                       <a:cxnSpLocks/>
-                      <a:stCxn id="12" idx="3"/>
+                      <a:stCxn id="2" idx="3"/>
                       <a:endCxn id="17" idx="1"/>
                     </p:cNvCxnSpPr>
                     <p:nvPr/>
                   </p:nvCxnSpPr>
                   <p:spPr>
-                    <a:xfrm>
-                      <a:off x="9199152" y="705590"/>
-                      <a:ext cx="1229252" cy="0"/>
+                    <a:xfrm flipV="1">
+                      <a:off x="11390400" y="694256"/>
+                      <a:ext cx="926741" cy="6060"/>
                     </a:xfrm>
                     <a:prstGeom prst="straightConnector1">
                       <a:avLst/>
@@ -6383,7 +6374,7 @@
                   </p:nvSpPr>
                   <p:spPr>
                     <a:xfrm>
-                      <a:off x="10428404" y="376209"/>
+                      <a:off x="12317141" y="364875"/>
                       <a:ext cx="1465424" cy="658761"/>
                     </a:xfrm>
                     <a:prstGeom prst="roundRect">
@@ -6665,8 +6656,8 @@
               </p:nvSpPr>
               <p:spPr>
                 <a:xfrm>
-                  <a:off x="8145603" y="1550680"/>
-                  <a:ext cx="1044137" cy="369332"/>
+                  <a:off x="8107002" y="1553832"/>
+                  <a:ext cx="944810" cy="369332"/>
                 </a:xfrm>
                 <a:prstGeom prst="rect">
                   <a:avLst/>
@@ -6680,14 +6671,11 @@
                 <a:lstStyle/>
                 <a:p>
                   <a:r>
-                    <a:rPr lang="fr-FR" dirty="0" err="1">
+                    <a:rPr lang="fr-FR" dirty="0">
                       <a:latin typeface="Tenorite" panose="00000500000000000000" pitchFamily="2" charset="0"/>
                     </a:rPr>
-                    <a:t>InfluxDB</a:t>
+                    <a:t>MQTT</a:t>
                   </a:r>
-                  <a:endParaRPr lang="fr-FR" dirty="0">
-                    <a:latin typeface="Tenorite" panose="00000500000000000000" pitchFamily="2" charset="0"/>
-                  </a:endParaRPr>
                 </a:p>
               </p:txBody>
             </p:sp>
@@ -6864,7 +6852,7 @@
             </p:nvSpPr>
             <p:spPr>
               <a:xfrm>
-                <a:off x="8857770" y="958299"/>
+                <a:off x="10769694" y="965033"/>
                 <a:ext cx="2082153" cy="369332"/>
               </a:xfrm>
               <a:prstGeom prst="rect">
@@ -6902,7 +6890,7 @@
             </p:nvSpPr>
             <p:spPr>
               <a:xfrm>
-                <a:off x="6182166" y="971399"/>
+                <a:off x="8366759" y="943949"/>
                 <a:ext cx="2082153" cy="369332"/>
               </a:xfrm>
               <a:prstGeom prst="rect">
@@ -6928,6 +6916,148 @@
           </p:sp>
         </p:grpSp>
       </p:grpSp>
+      <p:sp>
+        <p:nvSpPr>
+          <p:cNvPr id="2" name="Rectangle : coins arrondis 1">
+            <a:extLst>
+              <a:ext uri="{FF2B5EF4-FFF2-40B4-BE49-F238E27FC236}">
+                <a16:creationId xmlns:a16="http://schemas.microsoft.com/office/drawing/2014/main" id="{BBCD94BD-1854-2DDC-3CC3-2B763B6B128B}"/>
+              </a:ext>
+            </a:extLst>
+          </p:cNvPr>
+          <p:cNvSpPr/>
+          <p:nvPr/>
+        </p:nvSpPr>
+        <p:spPr>
+          <a:xfrm>
+            <a:off x="7965770" y="1898447"/>
+            <a:ext cx="1427280" cy="658761"/>
+          </a:xfrm>
+          <a:prstGeom prst="roundRect">
+            <a:avLst/>
+          </a:prstGeom>
+        </p:spPr>
+        <p:style>
+          <a:lnRef idx="2">
+            <a:schemeClr val="accent1">
+              <a:shade val="15000"/>
+            </a:schemeClr>
+          </a:lnRef>
+          <a:fillRef idx="1">
+            <a:schemeClr val="accent1"/>
+          </a:fillRef>
+          <a:effectRef idx="0">
+            <a:schemeClr val="accent1"/>
+          </a:effectRef>
+          <a:fontRef idx="minor">
+            <a:schemeClr val="lt1"/>
+          </a:fontRef>
+        </p:style>
+        <p:txBody>
+          <a:bodyPr rtlCol="0" anchor="ctr"/>
+          <a:lstStyle/>
+          <a:p>
+            <a:pPr algn="ctr"/>
+            <a:r>
+              <a:rPr lang="fr-FR" dirty="0">
+                <a:latin typeface="Tenorite" panose="00000500000000000000" pitchFamily="2" charset="0"/>
+              </a:rPr>
+              <a:t>Node-</a:t>
+            </a:r>
+            <a:r>
+              <a:rPr lang="fr-FR" dirty="0" err="1">
+                <a:latin typeface="Tenorite" panose="00000500000000000000" pitchFamily="2" charset="0"/>
+              </a:rPr>
+              <a:t>red</a:t>
+            </a:r>
+            <a:endParaRPr lang="fr-FR" dirty="0">
+              <a:latin typeface="Tenorite" panose="00000500000000000000" pitchFamily="2" charset="0"/>
+            </a:endParaRPr>
+          </a:p>
+        </p:txBody>
+      </p:sp>
+      <p:cxnSp>
+        <p:nvCxnSpPr>
+          <p:cNvPr id="14" name="Connecteur droit avec flèche 13">
+            <a:extLst>
+              <a:ext uri="{FF2B5EF4-FFF2-40B4-BE49-F238E27FC236}">
+                <a16:creationId xmlns:a16="http://schemas.microsoft.com/office/drawing/2014/main" id="{74B4C6A1-AD8B-CD97-E4BE-7E32BE0E462C}"/>
+              </a:ext>
+            </a:extLst>
+          </p:cNvPr>
+          <p:cNvCxnSpPr>
+            <a:cxnSpLocks/>
+            <a:endCxn id="2" idx="1"/>
+          </p:cNvCxnSpPr>
+          <p:nvPr/>
+        </p:nvCxnSpPr>
+        <p:spPr>
+          <a:xfrm>
+            <a:off x="7181967" y="2218015"/>
+            <a:ext cx="783803" cy="9813"/>
+          </a:xfrm>
+          <a:prstGeom prst="straightConnector1">
+            <a:avLst/>
+          </a:prstGeom>
+          <a:ln w="28575">
+            <a:tailEnd type="triangle"/>
+          </a:ln>
+        </p:spPr>
+        <p:style>
+          <a:lnRef idx="1">
+            <a:schemeClr val="accent1"/>
+          </a:lnRef>
+          <a:fillRef idx="0">
+            <a:schemeClr val="accent1"/>
+          </a:fillRef>
+          <a:effectRef idx="0">
+            <a:schemeClr val="accent1"/>
+          </a:effectRef>
+          <a:fontRef idx="minor">
+            <a:schemeClr val="tx1"/>
+          </a:fontRef>
+        </p:style>
+      </p:cxnSp>
+      <p:sp>
+        <p:nvSpPr>
+          <p:cNvPr id="15" name="ZoneTexte 14">
+            <a:extLst>
+              <a:ext uri="{FF2B5EF4-FFF2-40B4-BE49-F238E27FC236}">
+                <a16:creationId xmlns:a16="http://schemas.microsoft.com/office/drawing/2014/main" id="{F5950017-AE71-D05E-9BE8-FCA4927CCCF1}"/>
+              </a:ext>
+            </a:extLst>
+          </p:cNvPr>
+          <p:cNvSpPr txBox="1"/>
+          <p:nvPr/>
+        </p:nvSpPr>
+        <p:spPr>
+          <a:xfrm>
+            <a:off x="9321720" y="1814307"/>
+            <a:ext cx="1044137" cy="369332"/>
+          </a:xfrm>
+          <a:prstGeom prst="rect">
+            <a:avLst/>
+          </a:prstGeom>
+          <a:noFill/>
+        </p:spPr>
+        <p:txBody>
+          <a:bodyPr wrap="square" rtlCol="0">
+            <a:spAutoFit/>
+          </a:bodyPr>
+          <a:lstStyle/>
+          <a:p>
+            <a:r>
+              <a:rPr lang="fr-FR" dirty="0" err="1">
+                <a:latin typeface="Tenorite" panose="00000500000000000000" pitchFamily="2" charset="0"/>
+              </a:rPr>
+              <a:t>InfluxDB</a:t>
+            </a:r>
+            <a:endParaRPr lang="fr-FR" dirty="0">
+              <a:latin typeface="Tenorite" panose="00000500000000000000" pitchFamily="2" charset="0"/>
+            </a:endParaRPr>
+          </a:p>
+        </p:txBody>
+      </p:sp>
     </p:spTree>
     <p:extLst>
       <p:ext uri="{BB962C8B-B14F-4D97-AF65-F5344CB8AC3E}">
@@ -10323,15 +10453,6 @@
 </file>
 
 <file path=customXml/item1.xml><?xml version="1.0" encoding="utf-8"?>
-<?mso-contentType ?>
-<FormTemplates xmlns="http://schemas.microsoft.com/sharepoint/v3/contenttype/forms">
-  <Display>DocumentLibraryForm</Display>
-  <Edit>DocumentLibraryForm</Edit>
-  <New>DocumentLibraryForm</New>
-</FormTemplates>
-</file>
-
-<file path=customXml/item2.xml><?xml version="1.0" encoding="utf-8"?>
 <ct:contentTypeSchema xmlns:ct="http://schemas.microsoft.com/office/2006/metadata/contentType" xmlns:ma="http://schemas.microsoft.com/office/2006/metadata/properties/metaAttributes" ct:_="" ma:_="" ma:contentTypeName="Document" ma:contentTypeID="0x010100D1DBFDC516FB7D498F2708E0668661F7" ma:contentTypeVersion="15" ma:contentTypeDescription="Create a new document." ma:contentTypeScope="" ma:versionID="76190fd46b8ecc19c259073b19191ac1">
   <xsd:schema xmlns:xsd="http://www.w3.org/2001/XMLSchema" xmlns:xs="http://www.w3.org/2001/XMLSchema" xmlns:p="http://schemas.microsoft.com/office/2006/metadata/properties" xmlns:ns2="fd043017-6145-4171-ae53-4a2444b0f3a8" xmlns:ns3="ae4d9fed-4369-4efa-870f-7c4fbc625802" targetNamespace="http://schemas.microsoft.com/office/2006/metadata/properties" ma:root="true" ma:fieldsID="1923d3a5d954ca530e5d58ea92103f74" ns2:_="" ns3:_="">
     <xsd:import namespace="fd043017-6145-4171-ae53-4a2444b0f3a8"/>
@@ -10566,6 +10687,15 @@
 </ct:contentTypeSchema>
 </file>
 
+<file path=customXml/item2.xml><?xml version="1.0" encoding="utf-8"?>
+<?mso-contentType ?>
+<FormTemplates xmlns="http://schemas.microsoft.com/sharepoint/v3/contenttype/forms">
+  <Display>DocumentLibraryForm</Display>
+  <Edit>DocumentLibraryForm</Edit>
+  <New>DocumentLibraryForm</New>
+</FormTemplates>
+</file>
+
 <file path=customXml/item3.xml><?xml version="1.0" encoding="utf-8"?>
 <p:properties xmlns:p="http://schemas.microsoft.com/office/2006/metadata/properties" xmlns:xsi="http://www.w3.org/2001/XMLSchema-instance" xmlns:pc="http://schemas.microsoft.com/office/infopath/2007/PartnerControls">
   <documentManagement>
@@ -10578,14 +10708,6 @@
 </file>
 
 <file path=customXml/itemProps1.xml><?xml version="1.0" encoding="utf-8"?>
-<ds:datastoreItem xmlns:ds="http://schemas.openxmlformats.org/officeDocument/2006/customXml" ds:itemID="{90619B12-AFF5-4C5C-937B-0A7AB1969000}">
-  <ds:schemaRefs>
-    <ds:schemaRef ds:uri="http://schemas.microsoft.com/sharepoint/v3/contenttype/forms"/>
-  </ds:schemaRefs>
-</ds:datastoreItem>
-</file>
-
-<file path=customXml/itemProps2.xml><?xml version="1.0" encoding="utf-8"?>
 <ds:datastoreItem xmlns:ds="http://schemas.openxmlformats.org/officeDocument/2006/customXml" ds:itemID="{7FEA0324-74CB-4E11-A24D-EE3DF264393B}">
   <ds:schemaRefs>
     <ds:schemaRef ds:uri="http://schemas.microsoft.com/office/2006/metadata/contentType"/>
@@ -10600,6 +10722,14 @@
     <ds:schemaRef ds:uri="http://purl.org/dc/elements/1.1/"/>
     <ds:schemaRef ds:uri="http://purl.org/dc/terms/"/>
     <ds:schemaRef ds:uri="http://schemas.microsoft.com/internal/obd"/>
+  </ds:schemaRefs>
+</ds:datastoreItem>
+</file>
+
+<file path=customXml/itemProps2.xml><?xml version="1.0" encoding="utf-8"?>
+<ds:datastoreItem xmlns:ds="http://schemas.openxmlformats.org/officeDocument/2006/customXml" ds:itemID="{90619B12-AFF5-4C5C-937B-0A7AB1969000}">
+  <ds:schemaRefs>
+    <ds:schemaRef ds:uri="http://schemas.microsoft.com/sharepoint/v3/contenttype/forms"/>
   </ds:schemaRefs>
 </ds:datastoreItem>
 </file>

--- a/Docs/Projet_final.pptx
+++ b/Docs/Projet_final.pptx
@@ -3284,7 +3284,7 @@
               <a:rPr lang="en-US" b="1" dirty="0">
                 <a:cs typeface="Times New Roman" panose="02020603050405020304" pitchFamily="18" charset="0"/>
               </a:rPr>
-              <a:t>Nouhaila OUGASKI</a:t>
+              <a:t>Nouhaila OUFASKI</a:t>
             </a:r>
           </a:p>
           <a:p>
@@ -10453,6 +10453,15 @@
 </file>
 
 <file path=customXml/item1.xml><?xml version="1.0" encoding="utf-8"?>
+<?mso-contentType ?>
+<FormTemplates xmlns="http://schemas.microsoft.com/sharepoint/v3/contenttype/forms">
+  <Display>DocumentLibraryForm</Display>
+  <Edit>DocumentLibraryForm</Edit>
+  <New>DocumentLibraryForm</New>
+</FormTemplates>
+</file>
+
+<file path=customXml/item2.xml><?xml version="1.0" encoding="utf-8"?>
 <ct:contentTypeSchema xmlns:ct="http://schemas.microsoft.com/office/2006/metadata/contentType" xmlns:ma="http://schemas.microsoft.com/office/2006/metadata/properties/metaAttributes" ct:_="" ma:_="" ma:contentTypeName="Document" ma:contentTypeID="0x010100D1DBFDC516FB7D498F2708E0668661F7" ma:contentTypeVersion="15" ma:contentTypeDescription="Create a new document." ma:contentTypeScope="" ma:versionID="76190fd46b8ecc19c259073b19191ac1">
   <xsd:schema xmlns:xsd="http://www.w3.org/2001/XMLSchema" xmlns:xs="http://www.w3.org/2001/XMLSchema" xmlns:p="http://schemas.microsoft.com/office/2006/metadata/properties" xmlns:ns2="fd043017-6145-4171-ae53-4a2444b0f3a8" xmlns:ns3="ae4d9fed-4369-4efa-870f-7c4fbc625802" targetNamespace="http://schemas.microsoft.com/office/2006/metadata/properties" ma:root="true" ma:fieldsID="1923d3a5d954ca530e5d58ea92103f74" ns2:_="" ns3:_="">
     <xsd:import namespace="fd043017-6145-4171-ae53-4a2444b0f3a8"/>
@@ -10687,15 +10696,6 @@
 </ct:contentTypeSchema>
 </file>
 
-<file path=customXml/item2.xml><?xml version="1.0" encoding="utf-8"?>
-<?mso-contentType ?>
-<FormTemplates xmlns="http://schemas.microsoft.com/sharepoint/v3/contenttype/forms">
-  <Display>DocumentLibraryForm</Display>
-  <Edit>DocumentLibraryForm</Edit>
-  <New>DocumentLibraryForm</New>
-</FormTemplates>
-</file>
-
 <file path=customXml/item3.xml><?xml version="1.0" encoding="utf-8"?>
 <p:properties xmlns:p="http://schemas.microsoft.com/office/2006/metadata/properties" xmlns:xsi="http://www.w3.org/2001/XMLSchema-instance" xmlns:pc="http://schemas.microsoft.com/office/infopath/2007/PartnerControls">
   <documentManagement>
@@ -10708,6 +10708,14 @@
 </file>
 
 <file path=customXml/itemProps1.xml><?xml version="1.0" encoding="utf-8"?>
+<ds:datastoreItem xmlns:ds="http://schemas.openxmlformats.org/officeDocument/2006/customXml" ds:itemID="{90619B12-AFF5-4C5C-937B-0A7AB1969000}">
+  <ds:schemaRefs>
+    <ds:schemaRef ds:uri="http://schemas.microsoft.com/sharepoint/v3/contenttype/forms"/>
+  </ds:schemaRefs>
+</ds:datastoreItem>
+</file>
+
+<file path=customXml/itemProps2.xml><?xml version="1.0" encoding="utf-8"?>
 <ds:datastoreItem xmlns:ds="http://schemas.openxmlformats.org/officeDocument/2006/customXml" ds:itemID="{7FEA0324-74CB-4E11-A24D-EE3DF264393B}">
   <ds:schemaRefs>
     <ds:schemaRef ds:uri="http://schemas.microsoft.com/office/2006/metadata/contentType"/>
@@ -10722,14 +10730,6 @@
     <ds:schemaRef ds:uri="http://purl.org/dc/elements/1.1/"/>
     <ds:schemaRef ds:uri="http://purl.org/dc/terms/"/>
     <ds:schemaRef ds:uri="http://schemas.microsoft.com/internal/obd"/>
-  </ds:schemaRefs>
-</ds:datastoreItem>
-</file>
-
-<file path=customXml/itemProps2.xml><?xml version="1.0" encoding="utf-8"?>
-<ds:datastoreItem xmlns:ds="http://schemas.openxmlformats.org/officeDocument/2006/customXml" ds:itemID="{90619B12-AFF5-4C5C-937B-0A7AB1969000}">
-  <ds:schemaRefs>
-    <ds:schemaRef ds:uri="http://schemas.microsoft.com/sharepoint/v3/contenttype/forms"/>
   </ds:schemaRefs>
 </ds:datastoreItem>
 </file>

--- a/Docs/Projet_final.pptx
+++ b/Docs/Projet_final.pptx
@@ -6,10 +6,10 @@
     <p:sldMasterId id="2147483660" r:id="rId5"/>
   </p:sldMasterIdLst>
   <p:notesMasterIdLst>
-    <p:notesMasterId r:id="rId18"/>
+    <p:notesMasterId r:id="rId19"/>
   </p:notesMasterIdLst>
   <p:handoutMasterIdLst>
-    <p:handoutMasterId r:id="rId19"/>
+    <p:handoutMasterId r:id="rId20"/>
   </p:handoutMasterIdLst>
   <p:sldIdLst>
     <p:sldId id="256" r:id="rId6"/>
@@ -24,6 +24,7 @@
     <p:sldId id="311" r:id="rId15"/>
     <p:sldId id="312" r:id="rId16"/>
     <p:sldId id="313" r:id="rId17"/>
+    <p:sldId id="319" r:id="rId18"/>
   </p:sldIdLst>
   <p:sldSz cx="12192000" cy="6858000"/>
   <p:notesSz cx="6858000" cy="9144000"/>
@@ -757,6 +758,114 @@
     <p:extLst>
       <p:ext uri="{BB962C8B-B14F-4D97-AF65-F5344CB8AC3E}">
         <p14:creationId xmlns:p14="http://schemas.microsoft.com/office/powerpoint/2010/main" val="2987470732"/>
+      </p:ext>
+    </p:extLst>
+  </p:cSld>
+  <p:clrMapOvr>
+    <a:masterClrMapping/>
+  </p:clrMapOvr>
+</p:notes>
+</file>
+
+<file path=ppt/notesSlides/notesSlide2.xml><?xml version="1.0" encoding="utf-8"?>
+<p:notes xmlns:a="http://schemas.openxmlformats.org/drawingml/2006/main" xmlns:r="http://schemas.openxmlformats.org/officeDocument/2006/relationships" xmlns:p="http://schemas.openxmlformats.org/presentationml/2006/main">
+  <p:cSld>
+    <p:spTree>
+      <p:nvGrpSpPr>
+        <p:cNvPr id="1" name="">
+          <a:extLst>
+            <a:ext uri="{FF2B5EF4-FFF2-40B4-BE49-F238E27FC236}">
+              <a16:creationId xmlns:a16="http://schemas.microsoft.com/office/drawing/2014/main" id="{4D2694A6-0FEE-2114-A016-8204F8B9DED8}"/>
+            </a:ext>
+          </a:extLst>
+        </p:cNvPr>
+        <p:cNvGrpSpPr/>
+        <p:nvPr/>
+      </p:nvGrpSpPr>
+      <p:grpSpPr>
+        <a:xfrm>
+          <a:off x="0" y="0"/>
+          <a:ext cx="0" cy="0"/>
+          <a:chOff x="0" y="0"/>
+          <a:chExt cx="0" cy="0"/>
+        </a:xfrm>
+      </p:grpSpPr>
+      <p:sp>
+        <p:nvSpPr>
+          <p:cNvPr id="2" name="Espace réservé de l'image des diapositives 1">
+            <a:extLst>
+              <a:ext uri="{FF2B5EF4-FFF2-40B4-BE49-F238E27FC236}">
+                <a16:creationId xmlns:a16="http://schemas.microsoft.com/office/drawing/2014/main" id="{B7A2A262-BE67-3BF7-91F7-E3B6E6CAEFD4}"/>
+              </a:ext>
+            </a:extLst>
+          </p:cNvPr>
+          <p:cNvSpPr>
+            <a:spLocks noGrp="1" noRot="1" noChangeAspect="1"/>
+          </p:cNvSpPr>
+          <p:nvPr>
+            <p:ph type="sldImg"/>
+          </p:nvPr>
+        </p:nvSpPr>
+        <p:spPr/>
+      </p:sp>
+      <p:sp>
+        <p:nvSpPr>
+          <p:cNvPr id="3" name="Espace réservé des notes 2">
+            <a:extLst>
+              <a:ext uri="{FF2B5EF4-FFF2-40B4-BE49-F238E27FC236}">
+                <a16:creationId xmlns:a16="http://schemas.microsoft.com/office/drawing/2014/main" id="{5D835B24-FB12-AD54-B5D2-A21FC6082F64}"/>
+              </a:ext>
+            </a:extLst>
+          </p:cNvPr>
+          <p:cNvSpPr>
+            <a:spLocks noGrp="1"/>
+          </p:cNvSpPr>
+          <p:nvPr>
+            <p:ph type="body" idx="1"/>
+          </p:nvPr>
+        </p:nvSpPr>
+        <p:spPr/>
+        <p:txBody>
+          <a:bodyPr/>
+          <a:lstStyle/>
+          <a:p>
+            <a:endParaRPr lang="fr-FR" dirty="0"/>
+          </a:p>
+        </p:txBody>
+      </p:sp>
+      <p:sp>
+        <p:nvSpPr>
+          <p:cNvPr id="4" name="Espace réservé du numéro de diapositive 3">
+            <a:extLst>
+              <a:ext uri="{FF2B5EF4-FFF2-40B4-BE49-F238E27FC236}">
+                <a16:creationId xmlns:a16="http://schemas.microsoft.com/office/drawing/2014/main" id="{F6835263-0B50-C8B6-3D39-EC58FDE637BB}"/>
+              </a:ext>
+            </a:extLst>
+          </p:cNvPr>
+          <p:cNvSpPr>
+            <a:spLocks noGrp="1"/>
+          </p:cNvSpPr>
+          <p:nvPr>
+            <p:ph type="sldNum" sz="quarter" idx="5"/>
+          </p:nvPr>
+        </p:nvSpPr>
+        <p:spPr/>
+        <p:txBody>
+          <a:bodyPr/>
+          <a:lstStyle/>
+          <a:p>
+            <a:fld id="{3E1BF473-EC16-4647-BA3C-CDFDC5577E6A}" type="slidenum">
+              <a:rPr lang="fr-FR" smtClean="0"/>
+              <a:t>13</a:t>
+            </a:fld>
+            <a:endParaRPr lang="fr-FR"/>
+          </a:p>
+        </p:txBody>
+      </p:sp>
+    </p:spTree>
+    <p:extLst>
+      <p:ext uri="{BB962C8B-B14F-4D97-AF65-F5344CB8AC3E}">
+        <p14:creationId xmlns:p14="http://schemas.microsoft.com/office/powerpoint/2010/main" val="1527612580"/>
       </p:ext>
     </p:extLst>
   </p:cSld>
@@ -4689,10 +4798,212 @@
           </a:p>
         </p:txBody>
       </p:sp>
+      <p:pic>
+        <p:nvPicPr>
+          <p:cNvPr id="2" name="Image 1" descr="Une image contenant Ingénierie électronique, câble, fils électriques, Composant électronique&#10;&#10;Le contenu généré par l’IA peut être incorrect.">
+            <a:extLst>
+              <a:ext uri="{FF2B5EF4-FFF2-40B4-BE49-F238E27FC236}">
+                <a16:creationId xmlns:a16="http://schemas.microsoft.com/office/drawing/2014/main" id="{772F2D22-BC8B-A822-63E8-853AA2AB4EDF}"/>
+              </a:ext>
+            </a:extLst>
+          </p:cNvPr>
+          <p:cNvPicPr>
+            <a:picLocks noChangeAspect="1"/>
+          </p:cNvPicPr>
+          <p:nvPr/>
+        </p:nvPicPr>
+        <p:blipFill>
+          <a:blip r:embed="rId2">
+            <a:extLst>
+              <a:ext uri="{28A0092B-C50C-407E-A947-70E740481C1C}">
+                <a14:useLocalDpi xmlns:a14="http://schemas.microsoft.com/office/drawing/2010/main" val="0"/>
+              </a:ext>
+            </a:extLst>
+          </a:blip>
+          <a:stretch>
+            <a:fillRect/>
+          </a:stretch>
+        </p:blipFill>
+        <p:spPr>
+          <a:xfrm rot="16200000">
+            <a:off x="7109281" y="996772"/>
+            <a:ext cx="3752099" cy="4997592"/>
+          </a:xfrm>
+          <a:prstGeom prst="rect">
+            <a:avLst/>
+          </a:prstGeom>
+        </p:spPr>
+      </p:pic>
     </p:spTree>
     <p:extLst>
       <p:ext uri="{BB962C8B-B14F-4D97-AF65-F5344CB8AC3E}">
         <p14:creationId xmlns:p14="http://schemas.microsoft.com/office/powerpoint/2010/main" val="1390509475"/>
+      </p:ext>
+    </p:extLst>
+  </p:cSld>
+  <p:clrMapOvr>
+    <a:masterClrMapping/>
+  </p:clrMapOvr>
+</p:sld>
+</file>
+
+<file path=ppt/slides/slide13.xml><?xml version="1.0" encoding="utf-8"?>
+<p:sld xmlns:a="http://schemas.openxmlformats.org/drawingml/2006/main" xmlns:r="http://schemas.openxmlformats.org/officeDocument/2006/relationships" xmlns:p="http://schemas.openxmlformats.org/presentationml/2006/main">
+  <p:cSld>
+    <p:spTree>
+      <p:nvGrpSpPr>
+        <p:cNvPr id="1" name="">
+          <a:extLst>
+            <a:ext uri="{FF2B5EF4-FFF2-40B4-BE49-F238E27FC236}">
+              <a16:creationId xmlns:a16="http://schemas.microsoft.com/office/drawing/2014/main" id="{0E22EAFC-7A16-7EA0-10F4-38AEFC620D1B}"/>
+            </a:ext>
+          </a:extLst>
+        </p:cNvPr>
+        <p:cNvGrpSpPr/>
+        <p:nvPr/>
+      </p:nvGrpSpPr>
+      <p:grpSpPr>
+        <a:xfrm>
+          <a:off x="0" y="0"/>
+          <a:ext cx="0" cy="0"/>
+          <a:chOff x="0" y="0"/>
+          <a:chExt cx="0" cy="0"/>
+        </a:xfrm>
+      </p:grpSpPr>
+      <p:pic>
+        <p:nvPicPr>
+          <p:cNvPr id="8" name="Image 7" descr="Une image contenant capture d’écran, art, Graphique, bleu vert&#10;&#10;Le contenu généré par l’IA peut être incorrect.">
+            <a:extLst>
+              <a:ext uri="{FF2B5EF4-FFF2-40B4-BE49-F238E27FC236}">
+                <a16:creationId xmlns:a16="http://schemas.microsoft.com/office/drawing/2014/main" id="{B04E8CA1-674F-848A-D750-0821B35EBEAA}"/>
+              </a:ext>
+            </a:extLst>
+          </p:cNvPr>
+          <p:cNvPicPr>
+            <a:picLocks noChangeAspect="1"/>
+          </p:cNvPicPr>
+          <p:nvPr/>
+        </p:nvPicPr>
+        <p:blipFill>
+          <a:blip r:embed="rId3">
+            <a:extLst>
+              <a:ext uri="{28A0092B-C50C-407E-A947-70E740481C1C}">
+                <a14:useLocalDpi xmlns:a14="http://schemas.microsoft.com/office/drawing/2010/main" val="0"/>
+              </a:ext>
+            </a:extLst>
+          </a:blip>
+          <a:stretch>
+            <a:fillRect/>
+          </a:stretch>
+        </p:blipFill>
+        <p:spPr>
+          <a:xfrm>
+            <a:off x="6807112" y="0"/>
+            <a:ext cx="5384888" cy="6302523"/>
+          </a:xfrm>
+          <a:prstGeom prst="rect">
+            <a:avLst/>
+          </a:prstGeom>
+        </p:spPr>
+      </p:pic>
+      <p:sp>
+        <p:nvSpPr>
+          <p:cNvPr id="12" name="Titre 2">
+            <a:extLst>
+              <a:ext uri="{FF2B5EF4-FFF2-40B4-BE49-F238E27FC236}">
+                <a16:creationId xmlns:a16="http://schemas.microsoft.com/office/drawing/2014/main" id="{34A20E6D-C7FB-890B-37D8-C3DACB27B1B3}"/>
+              </a:ext>
+            </a:extLst>
+          </p:cNvPr>
+          <p:cNvSpPr txBox="1">
+            <a:spLocks/>
+          </p:cNvSpPr>
+          <p:nvPr/>
+        </p:nvSpPr>
+        <p:spPr>
+          <a:xfrm>
+            <a:off x="134306" y="2478274"/>
+            <a:ext cx="6672806" cy="646331"/>
+          </a:xfrm>
+          <a:prstGeom prst="rect">
+            <a:avLst/>
+          </a:prstGeom>
+          <a:solidFill>
+            <a:schemeClr val="bg1"/>
+          </a:solidFill>
+        </p:spPr>
+        <p:txBody>
+          <a:bodyPr anchor="ctr" anchorCtr="0">
+            <a:normAutofit/>
+          </a:bodyPr>
+          <a:lstStyle>
+            <a:lvl1pPr algn="r" defTabSz="914400" rtl="0" eaLnBrk="1" latinLnBrk="0" hangingPunct="1">
+              <a:lnSpc>
+                <a:spcPct val="90000"/>
+              </a:lnSpc>
+              <a:spcBef>
+                <a:spcPct val="0"/>
+              </a:spcBef>
+              <a:buNone/>
+              <a:defRPr sz="3200" b="1" kern="1200">
+                <a:solidFill>
+                  <a:schemeClr val="tx1"/>
+                </a:solidFill>
+                <a:latin typeface="Tenorite" panose="00000500000000000000" pitchFamily="2" charset="0"/>
+                <a:ea typeface="+mj-ea"/>
+                <a:cs typeface="Arial" panose="020B0604020202020204" pitchFamily="34" charset="0"/>
+              </a:defRPr>
+            </a:lvl1pPr>
+          </a:lstStyle>
+          <a:p>
+            <a:r>
+              <a:rPr lang="en-US" dirty="0"/>
+              <a:t>THANK YOU FOR YOUR ATTENTION</a:t>
+            </a:r>
+            <a:endParaRPr lang="fr-FR" dirty="0"/>
+          </a:p>
+        </p:txBody>
+      </p:sp>
+      <p:sp>
+        <p:nvSpPr>
+          <p:cNvPr id="13" name="Sous-titre 3">
+            <a:extLst>
+              <a:ext uri="{FF2B5EF4-FFF2-40B4-BE49-F238E27FC236}">
+                <a16:creationId xmlns:a16="http://schemas.microsoft.com/office/drawing/2014/main" id="{1E2F4539-4642-F937-CB0B-4B8FE31BEF62}"/>
+              </a:ext>
+            </a:extLst>
+          </p:cNvPr>
+          <p:cNvSpPr>
+            <a:spLocks noGrp="1"/>
+          </p:cNvSpPr>
+          <p:nvPr>
+            <p:ph type="subTitle" idx="1"/>
+          </p:nvPr>
+        </p:nvSpPr>
+        <p:spPr>
+          <a:xfrm>
+            <a:off x="6484" y="3534988"/>
+            <a:ext cx="3951287" cy="396815"/>
+          </a:xfrm>
+          <a:solidFill>
+            <a:schemeClr val="bg1"/>
+          </a:solidFill>
+        </p:spPr>
+        <p:txBody>
+          <a:bodyPr/>
+          <a:lstStyle/>
+          <a:p>
+            <a:r>
+              <a:rPr lang="en-US" dirty="0"/>
+              <a:t>Feel free to ask any question</a:t>
+            </a:r>
+          </a:p>
+        </p:txBody>
+      </p:sp>
+    </p:spTree>
+    <p:extLst>
+      <p:ext uri="{BB962C8B-B14F-4D97-AF65-F5344CB8AC3E}">
+        <p14:creationId xmlns:p14="http://schemas.microsoft.com/office/powerpoint/2010/main" val="1254972480"/>
       </p:ext>
     </p:extLst>
   </p:cSld>
@@ -7605,6 +7916,42 @@
           </p:txBody>
         </p:sp>
       </p:grpSp>
+      <p:pic>
+        <p:nvPicPr>
+          <p:cNvPr id="3" name="Image 2" descr="Une image contenant Ingénierie électronique, câble, fils électriques, Composant électronique&#10;&#10;Le contenu généré par l’IA peut être incorrect.">
+            <a:extLst>
+              <a:ext uri="{FF2B5EF4-FFF2-40B4-BE49-F238E27FC236}">
+                <a16:creationId xmlns:a16="http://schemas.microsoft.com/office/drawing/2014/main" id="{4E96CF89-A2D1-6F60-DE67-77692B05B995}"/>
+              </a:ext>
+            </a:extLst>
+          </p:cNvPr>
+          <p:cNvPicPr>
+            <a:picLocks noChangeAspect="1"/>
+          </p:cNvPicPr>
+          <p:nvPr/>
+        </p:nvPicPr>
+        <p:blipFill>
+          <a:blip r:embed="rId6">
+            <a:extLst>
+              <a:ext uri="{28A0092B-C50C-407E-A947-70E740481C1C}">
+                <a14:useLocalDpi xmlns:a14="http://schemas.microsoft.com/office/drawing/2010/main" val="0"/>
+              </a:ext>
+            </a:extLst>
+          </a:blip>
+          <a:stretch>
+            <a:fillRect/>
+          </a:stretch>
+        </p:blipFill>
+        <p:spPr>
+          <a:xfrm rot="16200000">
+            <a:off x="7109281" y="996772"/>
+            <a:ext cx="3752099" cy="4997592"/>
+          </a:xfrm>
+          <a:prstGeom prst="rect">
+            <a:avLst/>
+          </a:prstGeom>
+        </p:spPr>
+      </p:pic>
     </p:spTree>
     <p:extLst>
       <p:ext uri="{BB962C8B-B14F-4D97-AF65-F5344CB8AC3E}">
@@ -10453,15 +10800,6 @@
 </file>
 
 <file path=customXml/item1.xml><?xml version="1.0" encoding="utf-8"?>
-<?mso-contentType ?>
-<FormTemplates xmlns="http://schemas.microsoft.com/sharepoint/v3/contenttype/forms">
-  <Display>DocumentLibraryForm</Display>
-  <Edit>DocumentLibraryForm</Edit>
-  <New>DocumentLibraryForm</New>
-</FormTemplates>
-</file>
-
-<file path=customXml/item2.xml><?xml version="1.0" encoding="utf-8"?>
 <ct:contentTypeSchema xmlns:ct="http://schemas.microsoft.com/office/2006/metadata/contentType" xmlns:ma="http://schemas.microsoft.com/office/2006/metadata/properties/metaAttributes" ct:_="" ma:_="" ma:contentTypeName="Document" ma:contentTypeID="0x010100D1DBFDC516FB7D498F2708E0668661F7" ma:contentTypeVersion="15" ma:contentTypeDescription="Create a new document." ma:contentTypeScope="" ma:versionID="76190fd46b8ecc19c259073b19191ac1">
   <xsd:schema xmlns:xsd="http://www.w3.org/2001/XMLSchema" xmlns:xs="http://www.w3.org/2001/XMLSchema" xmlns:p="http://schemas.microsoft.com/office/2006/metadata/properties" xmlns:ns2="fd043017-6145-4171-ae53-4a2444b0f3a8" xmlns:ns3="ae4d9fed-4369-4efa-870f-7c4fbc625802" targetNamespace="http://schemas.microsoft.com/office/2006/metadata/properties" ma:root="true" ma:fieldsID="1923d3a5d954ca530e5d58ea92103f74" ns2:_="" ns3:_="">
     <xsd:import namespace="fd043017-6145-4171-ae53-4a2444b0f3a8"/>
@@ -10696,6 +11034,15 @@
 </ct:contentTypeSchema>
 </file>
 
+<file path=customXml/item2.xml><?xml version="1.0" encoding="utf-8"?>
+<?mso-contentType ?>
+<FormTemplates xmlns="http://schemas.microsoft.com/sharepoint/v3/contenttype/forms">
+  <Display>DocumentLibraryForm</Display>
+  <Edit>DocumentLibraryForm</Edit>
+  <New>DocumentLibraryForm</New>
+</FormTemplates>
+</file>
+
 <file path=customXml/item3.xml><?xml version="1.0" encoding="utf-8"?>
 <p:properties xmlns:p="http://schemas.microsoft.com/office/2006/metadata/properties" xmlns:xsi="http://www.w3.org/2001/XMLSchema-instance" xmlns:pc="http://schemas.microsoft.com/office/infopath/2007/PartnerControls">
   <documentManagement>
@@ -10708,14 +11055,6 @@
 </file>
 
 <file path=customXml/itemProps1.xml><?xml version="1.0" encoding="utf-8"?>
-<ds:datastoreItem xmlns:ds="http://schemas.openxmlformats.org/officeDocument/2006/customXml" ds:itemID="{90619B12-AFF5-4C5C-937B-0A7AB1969000}">
-  <ds:schemaRefs>
-    <ds:schemaRef ds:uri="http://schemas.microsoft.com/sharepoint/v3/contenttype/forms"/>
-  </ds:schemaRefs>
-</ds:datastoreItem>
-</file>
-
-<file path=customXml/itemProps2.xml><?xml version="1.0" encoding="utf-8"?>
 <ds:datastoreItem xmlns:ds="http://schemas.openxmlformats.org/officeDocument/2006/customXml" ds:itemID="{7FEA0324-74CB-4E11-A24D-EE3DF264393B}">
   <ds:schemaRefs>
     <ds:schemaRef ds:uri="http://schemas.microsoft.com/office/2006/metadata/contentType"/>
@@ -10730,6 +11069,14 @@
     <ds:schemaRef ds:uri="http://purl.org/dc/elements/1.1/"/>
     <ds:schemaRef ds:uri="http://purl.org/dc/terms/"/>
     <ds:schemaRef ds:uri="http://schemas.microsoft.com/internal/obd"/>
+  </ds:schemaRefs>
+</ds:datastoreItem>
+</file>
+
+<file path=customXml/itemProps2.xml><?xml version="1.0" encoding="utf-8"?>
+<ds:datastoreItem xmlns:ds="http://schemas.openxmlformats.org/officeDocument/2006/customXml" ds:itemID="{90619B12-AFF5-4C5C-937B-0A7AB1969000}">
+  <ds:schemaRefs>
+    <ds:schemaRef ds:uri="http://schemas.microsoft.com/sharepoint/v3/contenttype/forms"/>
   </ds:schemaRefs>
 </ds:datastoreItem>
 </file>

--- a/Docs/Projet_final.pptx
+++ b/Docs/Projet_final.pptx
@@ -239,7 +239,7 @@
           <a:p>
             <a:fld id="{240488B5-15B3-496A-A880-2DCC344E83BB}" type="datetimeFigureOut">
               <a:rPr lang="fr-FR" smtClean="0"/>
-              <a:t>25/02/2026</a:t>
+              <a:t>26/02/2026</a:t>
             </a:fld>
             <a:endParaRPr lang="fr-FR"/>
           </a:p>
@@ -416,7 +416,7 @@
           <a:p>
             <a:fld id="{3FE4E41A-B500-4E07-B0F6-B74CA4F34813}" type="datetimeFigureOut">
               <a:rPr lang="fr-FR" smtClean="0"/>
-              <a:t>25/02/2026</a:t>
+              <a:t>26/02/2026</a:t>
             </a:fld>
             <a:endParaRPr lang="fr-FR"/>
           </a:p>
@@ -6348,10 +6348,10 @@
       </p:sp>
       <p:grpSp>
         <p:nvGrpSpPr>
-          <p:cNvPr id="50" name="Groupe 49">
+          <p:cNvPr id="3" name="Groupe 2">
             <a:extLst>
               <a:ext uri="{FF2B5EF4-FFF2-40B4-BE49-F238E27FC236}">
-                <a16:creationId xmlns:a16="http://schemas.microsoft.com/office/drawing/2014/main" id="{46E2CD11-876F-A893-2C0F-CA3D3C2A69F8}"/>
+                <a16:creationId xmlns:a16="http://schemas.microsoft.com/office/drawing/2014/main" id="{D47C7EEF-CFA8-2FD9-D522-8A42B1BD3BC7}"/>
               </a:ext>
             </a:extLst>
           </p:cNvPr>
@@ -6362,54 +6362,16 @@
           <a:xfrm>
             <a:off x="0" y="1510051"/>
             <a:ext cx="12116766" cy="3154800"/>
-            <a:chOff x="735081" y="943949"/>
+            <a:chOff x="0" y="1510051"/>
             <a:chExt cx="12116766" cy="3154800"/>
           </a:xfrm>
         </p:grpSpPr>
-        <p:sp>
-          <p:nvSpPr>
-            <p:cNvPr id="46" name="ZoneTexte 45">
+        <p:grpSp>
+          <p:nvGrpSpPr>
+            <p:cNvPr id="50" name="Groupe 49">
               <a:extLst>
                 <a:ext uri="{FF2B5EF4-FFF2-40B4-BE49-F238E27FC236}">
-                  <a16:creationId xmlns:a16="http://schemas.microsoft.com/office/drawing/2014/main" id="{DAA2B0EF-AA3F-E07A-94B8-7F8B9358CD32}"/>
-                </a:ext>
-              </a:extLst>
-            </p:cNvPr>
-            <p:cNvSpPr txBox="1"/>
-            <p:nvPr/>
-          </p:nvSpPr>
-          <p:spPr>
-            <a:xfrm>
-              <a:off x="6182166" y="3729417"/>
-              <a:ext cx="2082153" cy="369332"/>
-            </a:xfrm>
-            <a:prstGeom prst="rect">
-              <a:avLst/>
-            </a:prstGeom>
-            <a:noFill/>
-          </p:spPr>
-          <p:txBody>
-            <a:bodyPr wrap="square" rtlCol="0">
-              <a:spAutoFit/>
-            </a:bodyPr>
-            <a:lstStyle/>
-            <a:p>
-              <a:pPr algn="ctr"/>
-              <a:r>
-                <a:rPr lang="fr-FR" b="1" dirty="0">
-                  <a:latin typeface="Tenorite" panose="00000500000000000000" pitchFamily="2" charset="0"/>
-                </a:rPr>
-                <a:t>Alertes</a:t>
-              </a:r>
-            </a:p>
-          </p:txBody>
-        </p:sp>
-        <p:grpSp>
-          <p:nvGrpSpPr>
-            <p:cNvPr id="49" name="Groupe 48">
-              <a:extLst>
-                <a:ext uri="{FF2B5EF4-FFF2-40B4-BE49-F238E27FC236}">
-                  <a16:creationId xmlns:a16="http://schemas.microsoft.com/office/drawing/2014/main" id="{6F52C151-3744-6047-D0A7-43775D657327}"/>
+                  <a16:creationId xmlns:a16="http://schemas.microsoft.com/office/drawing/2014/main" id="{46E2CD11-876F-A893-2C0F-CA3D3C2A69F8}"/>
                 </a:ext>
               </a:extLst>
             </p:cNvPr>
@@ -6418,18 +6380,56 @@
           </p:nvGrpSpPr>
           <p:grpSpPr>
             <a:xfrm>
-              <a:off x="735081" y="943949"/>
-              <a:ext cx="12116766" cy="2739051"/>
+              <a:off x="0" y="1510051"/>
+              <a:ext cx="12116766" cy="3154800"/>
               <a:chOff x="735081" y="943949"/>
-              <a:chExt cx="12116766" cy="2739051"/>
+              <a:chExt cx="12116766" cy="3154800"/>
             </a:xfrm>
           </p:grpSpPr>
+          <p:sp>
+            <p:nvSpPr>
+              <p:cNvPr id="46" name="ZoneTexte 45">
+                <a:extLst>
+                  <a:ext uri="{FF2B5EF4-FFF2-40B4-BE49-F238E27FC236}">
+                    <a16:creationId xmlns:a16="http://schemas.microsoft.com/office/drawing/2014/main" id="{DAA2B0EF-AA3F-E07A-94B8-7F8B9358CD32}"/>
+                  </a:ext>
+                </a:extLst>
+              </p:cNvPr>
+              <p:cNvSpPr txBox="1"/>
+              <p:nvPr/>
+            </p:nvSpPr>
+            <p:spPr>
+              <a:xfrm>
+                <a:off x="6182166" y="3729417"/>
+                <a:ext cx="2082153" cy="369332"/>
+              </a:xfrm>
+              <a:prstGeom prst="rect">
+                <a:avLst/>
+              </a:prstGeom>
+              <a:noFill/>
+            </p:spPr>
+            <p:txBody>
+              <a:bodyPr wrap="square" rtlCol="0">
+                <a:spAutoFit/>
+              </a:bodyPr>
+              <a:lstStyle/>
+              <a:p>
+                <a:pPr algn="ctr"/>
+                <a:r>
+                  <a:rPr lang="fr-FR" b="1" dirty="0">
+                    <a:latin typeface="Tenorite" panose="00000500000000000000" pitchFamily="2" charset="0"/>
+                  </a:rPr>
+                  <a:t>Alertes</a:t>
+                </a:r>
+              </a:p>
+            </p:txBody>
+          </p:sp>
           <p:grpSp>
             <p:nvGrpSpPr>
-              <p:cNvPr id="41" name="Groupe 40">
+              <p:cNvPr id="49" name="Groupe 48">
                 <a:extLst>
                   <a:ext uri="{FF2B5EF4-FFF2-40B4-BE49-F238E27FC236}">
-                    <a16:creationId xmlns:a16="http://schemas.microsoft.com/office/drawing/2014/main" id="{22A5F301-4FED-7131-FF1B-2E281150CAF6}"/>
+                    <a16:creationId xmlns:a16="http://schemas.microsoft.com/office/drawing/2014/main" id="{6F52C151-3744-6047-D0A7-43775D657327}"/>
                   </a:ext>
                 </a:extLst>
               </p:cNvPr>
@@ -6438,18 +6438,18 @@
             </p:nvGrpSpPr>
             <p:grpSpPr>
               <a:xfrm>
-                <a:off x="1098221" y="1280844"/>
-                <a:ext cx="11422075" cy="2402156"/>
-                <a:chOff x="1306942" y="1553832"/>
-                <a:chExt cx="11422075" cy="2402156"/>
+                <a:off x="735081" y="943949"/>
+                <a:ext cx="12116766" cy="2739051"/>
+                <a:chOff x="735081" y="943949"/>
+                <a:chExt cx="12116766" cy="2739051"/>
               </a:xfrm>
             </p:grpSpPr>
             <p:grpSp>
               <p:nvGrpSpPr>
-                <p:cNvPr id="32" name="Groupe 31">
+                <p:cNvPr id="41" name="Groupe 40">
                   <a:extLst>
                     <a:ext uri="{FF2B5EF4-FFF2-40B4-BE49-F238E27FC236}">
-                      <a16:creationId xmlns:a16="http://schemas.microsoft.com/office/drawing/2014/main" id="{4AC23FC3-6E08-2580-E6A8-2D284BC856AC}"/>
+                      <a16:creationId xmlns:a16="http://schemas.microsoft.com/office/drawing/2014/main" id="{22A5F301-4FED-7131-FF1B-2E281150CAF6}"/>
                     </a:ext>
                   </a:extLst>
                 </p:cNvPr>
@@ -6458,18 +6458,18 @@
               </p:nvGrpSpPr>
               <p:grpSpPr>
                 <a:xfrm>
-                  <a:off x="1306942" y="1599273"/>
-                  <a:ext cx="11422075" cy="2356715"/>
-                  <a:chOff x="2211403" y="1122195"/>
-                  <a:chExt cx="11422075" cy="2356715"/>
+                  <a:off x="1098221" y="1280844"/>
+                  <a:ext cx="11422075" cy="2402156"/>
+                  <a:chOff x="1306942" y="1553832"/>
+                  <a:chExt cx="11422075" cy="2402156"/>
                 </a:xfrm>
               </p:grpSpPr>
               <p:grpSp>
                 <p:nvGrpSpPr>
-                  <p:cNvPr id="4" name="Groupe 3">
+                  <p:cNvPr id="32" name="Groupe 31">
                     <a:extLst>
                       <a:ext uri="{FF2B5EF4-FFF2-40B4-BE49-F238E27FC236}">
-                        <a16:creationId xmlns:a16="http://schemas.microsoft.com/office/drawing/2014/main" id="{8BD956AE-5290-C95C-B3AB-9119A290765E}"/>
+                        <a16:creationId xmlns:a16="http://schemas.microsoft.com/office/drawing/2014/main" id="{4AC23FC3-6E08-2580-E6A8-2D284BC856AC}"/>
                       </a:ext>
                     </a:extLst>
                   </p:cNvPr>
@@ -6478,18 +6478,280 @@
                 </p:nvGrpSpPr>
                 <p:grpSpPr>
                   <a:xfrm>
-                    <a:off x="4999489" y="1122195"/>
-                    <a:ext cx="8633989" cy="1490912"/>
-                    <a:chOff x="5148576" y="364875"/>
-                    <a:chExt cx="8633989" cy="1490912"/>
+                    <a:off x="1306942" y="1599273"/>
+                    <a:ext cx="11422075" cy="2356715"/>
+                    <a:chOff x="2211403" y="1122195"/>
+                    <a:chExt cx="11422075" cy="2356715"/>
                   </a:xfrm>
                 </p:grpSpPr>
+                <p:grpSp>
+                  <p:nvGrpSpPr>
+                    <p:cNvPr id="4" name="Groupe 3">
+                      <a:extLst>
+                        <a:ext uri="{FF2B5EF4-FFF2-40B4-BE49-F238E27FC236}">
+                          <a16:creationId xmlns:a16="http://schemas.microsoft.com/office/drawing/2014/main" id="{8BD956AE-5290-C95C-B3AB-9119A290765E}"/>
+                        </a:ext>
+                      </a:extLst>
+                    </p:cNvPr>
+                    <p:cNvGrpSpPr/>
+                    <p:nvPr/>
+                  </p:nvGrpSpPr>
+                  <p:grpSpPr>
+                    <a:xfrm>
+                      <a:off x="4999489" y="1122195"/>
+                      <a:ext cx="8633989" cy="1490912"/>
+                      <a:chOff x="5148576" y="364875"/>
+                      <a:chExt cx="8633989" cy="1490912"/>
+                    </a:xfrm>
+                  </p:grpSpPr>
+                  <p:sp>
+                    <p:nvSpPr>
+                      <p:cNvPr id="7" name="Rectangle : coins arrondis 6">
+                        <a:extLst>
+                          <a:ext uri="{FF2B5EF4-FFF2-40B4-BE49-F238E27FC236}">
+                            <a16:creationId xmlns:a16="http://schemas.microsoft.com/office/drawing/2014/main" id="{CD476A8C-A792-ACFA-E3C1-D9FBE6BDE7BD}"/>
+                          </a:ext>
+                        </a:extLst>
+                      </p:cNvPr>
+                      <p:cNvSpPr/>
+                      <p:nvPr/>
+                    </p:nvSpPr>
+                    <p:spPr>
+                      <a:xfrm>
+                        <a:off x="5148576" y="1197026"/>
+                        <a:ext cx="1394043" cy="658761"/>
+                      </a:xfrm>
+                      <a:prstGeom prst="roundRect">
+                        <a:avLst/>
+                      </a:prstGeom>
+                    </p:spPr>
+                    <p:style>
+                      <a:lnRef idx="2">
+                        <a:schemeClr val="accent1">
+                          <a:shade val="15000"/>
+                        </a:schemeClr>
+                      </a:lnRef>
+                      <a:fillRef idx="1">
+                        <a:schemeClr val="accent1"/>
+                      </a:fillRef>
+                      <a:effectRef idx="0">
+                        <a:schemeClr val="accent1"/>
+                      </a:effectRef>
+                      <a:fontRef idx="minor">
+                        <a:schemeClr val="lt1"/>
+                      </a:fontRef>
+                    </p:style>
+                    <p:txBody>
+                      <a:bodyPr rtlCol="0" anchor="ctr"/>
+                      <a:lstStyle/>
+                      <a:p>
+                        <a:pPr algn="ctr"/>
+                        <a:r>
+                          <a:rPr lang="fr-FR" dirty="0">
+                            <a:latin typeface="Tenorite" panose="00000500000000000000" pitchFamily="2" charset="0"/>
+                          </a:rPr>
+                          <a:t>Relay</a:t>
+                        </a:r>
+                      </a:p>
+                    </p:txBody>
+                  </p:sp>
+                  <p:cxnSp>
+                    <p:nvCxnSpPr>
+                      <p:cNvPr id="10" name="Connecteur droit avec flèche 9">
+                        <a:extLst>
+                          <a:ext uri="{FF2B5EF4-FFF2-40B4-BE49-F238E27FC236}">
+                            <a16:creationId xmlns:a16="http://schemas.microsoft.com/office/drawing/2014/main" id="{E986E018-FEA9-7C39-C865-4D2B6ABE3CCC}"/>
+                          </a:ext>
+                        </a:extLst>
+                      </p:cNvPr>
+                      <p:cNvCxnSpPr>
+                        <a:cxnSpLocks/>
+                        <a:endCxn id="12" idx="1"/>
+                      </p:cNvCxnSpPr>
+                      <p:nvPr/>
+                    </p:nvCxnSpPr>
+                    <p:spPr>
+                      <a:xfrm flipV="1">
+                        <a:off x="6542619" y="705590"/>
+                        <a:ext cx="1229253" cy="692202"/>
+                      </a:xfrm>
+                      <a:prstGeom prst="straightConnector1">
+                        <a:avLst/>
+                      </a:prstGeom>
+                      <a:ln w="28575">
+                        <a:tailEnd type="triangle"/>
+                      </a:ln>
+                    </p:spPr>
+                    <p:style>
+                      <a:lnRef idx="1">
+                        <a:schemeClr val="accent1"/>
+                      </a:lnRef>
+                      <a:fillRef idx="0">
+                        <a:schemeClr val="accent1"/>
+                      </a:fillRef>
+                      <a:effectRef idx="0">
+                        <a:schemeClr val="accent1"/>
+                      </a:effectRef>
+                      <a:fontRef idx="minor">
+                        <a:schemeClr val="tx1"/>
+                      </a:fontRef>
+                    </p:style>
+                  </p:cxnSp>
+                  <p:sp>
+                    <p:nvSpPr>
+                      <p:cNvPr id="12" name="Rectangle : coins arrondis 11">
+                        <a:extLst>
+                          <a:ext uri="{FF2B5EF4-FFF2-40B4-BE49-F238E27FC236}">
+                            <a16:creationId xmlns:a16="http://schemas.microsoft.com/office/drawing/2014/main" id="{86C6F40D-74EA-EC28-3291-681F43E6B80E}"/>
+                          </a:ext>
+                        </a:extLst>
+                      </p:cNvPr>
+                      <p:cNvSpPr/>
+                      <p:nvPr/>
+                    </p:nvSpPr>
+                    <p:spPr>
+                      <a:xfrm>
+                        <a:off x="7771872" y="376209"/>
+                        <a:ext cx="1427280" cy="658761"/>
+                      </a:xfrm>
+                      <a:prstGeom prst="roundRect">
+                        <a:avLst/>
+                      </a:prstGeom>
+                    </p:spPr>
+                    <p:style>
+                      <a:lnRef idx="2">
+                        <a:schemeClr val="accent1">
+                          <a:shade val="15000"/>
+                        </a:schemeClr>
+                      </a:lnRef>
+                      <a:fillRef idx="1">
+                        <a:schemeClr val="accent1"/>
+                      </a:fillRef>
+                      <a:effectRef idx="0">
+                        <a:schemeClr val="accent1"/>
+                      </a:effectRef>
+                      <a:fontRef idx="minor">
+                        <a:schemeClr val="lt1"/>
+                      </a:fontRef>
+                    </p:style>
+                    <p:txBody>
+                      <a:bodyPr rtlCol="0" anchor="ctr"/>
+                      <a:lstStyle/>
+                      <a:p>
+                        <a:pPr algn="ctr"/>
+                        <a:r>
+                          <a:rPr lang="fr-FR" dirty="0">
+                            <a:latin typeface="Tenorite" panose="00000500000000000000" pitchFamily="2" charset="0"/>
+                          </a:rPr>
+                          <a:t>Satellite</a:t>
+                        </a:r>
+                      </a:p>
+                    </p:txBody>
+                  </p:sp>
+                  <p:cxnSp>
+                    <p:nvCxnSpPr>
+                      <p:cNvPr id="16" name="Connecteur droit avec flèche 15">
+                        <a:extLst>
+                          <a:ext uri="{FF2B5EF4-FFF2-40B4-BE49-F238E27FC236}">
+                            <a16:creationId xmlns:a16="http://schemas.microsoft.com/office/drawing/2014/main" id="{E19834EB-DDBC-F9EC-58FE-580255D485A0}"/>
+                          </a:ext>
+                        </a:extLst>
+                      </p:cNvPr>
+                      <p:cNvCxnSpPr>
+                        <a:cxnSpLocks/>
+                        <a:stCxn id="2" idx="3"/>
+                        <a:endCxn id="17" idx="1"/>
+                      </p:cNvCxnSpPr>
+                      <p:nvPr/>
+                    </p:nvCxnSpPr>
+                    <p:spPr>
+                      <a:xfrm flipV="1">
+                        <a:off x="11390400" y="694256"/>
+                        <a:ext cx="926741" cy="6060"/>
+                      </a:xfrm>
+                      <a:prstGeom prst="straightConnector1">
+                        <a:avLst/>
+                      </a:prstGeom>
+                      <a:ln w="28575">
+                        <a:tailEnd type="triangle"/>
+                      </a:ln>
+                    </p:spPr>
+                    <p:style>
+                      <a:lnRef idx="1">
+                        <a:schemeClr val="accent1"/>
+                      </a:lnRef>
+                      <a:fillRef idx="0">
+                        <a:schemeClr val="accent1"/>
+                      </a:fillRef>
+                      <a:effectRef idx="0">
+                        <a:schemeClr val="accent1"/>
+                      </a:effectRef>
+                      <a:fontRef idx="minor">
+                        <a:schemeClr val="tx1"/>
+                      </a:fontRef>
+                    </p:style>
+                  </p:cxnSp>
+                  <p:sp>
+                    <p:nvSpPr>
+                      <p:cNvPr id="17" name="Rectangle : coins arrondis 16">
+                        <a:extLst>
+                          <a:ext uri="{FF2B5EF4-FFF2-40B4-BE49-F238E27FC236}">
+                            <a16:creationId xmlns:a16="http://schemas.microsoft.com/office/drawing/2014/main" id="{57661EC9-CC12-3D47-9391-AA97243A10CB}"/>
+                          </a:ext>
+                        </a:extLst>
+                      </p:cNvPr>
+                      <p:cNvSpPr/>
+                      <p:nvPr/>
+                    </p:nvSpPr>
+                    <p:spPr>
+                      <a:xfrm>
+                        <a:off x="12317141" y="364875"/>
+                        <a:ext cx="1465424" cy="658761"/>
+                      </a:xfrm>
+                      <a:prstGeom prst="roundRect">
+                        <a:avLst/>
+                      </a:prstGeom>
+                    </p:spPr>
+                    <p:style>
+                      <a:lnRef idx="2">
+                        <a:schemeClr val="accent1">
+                          <a:shade val="15000"/>
+                        </a:schemeClr>
+                      </a:lnRef>
+                      <a:fillRef idx="1">
+                        <a:schemeClr val="accent1"/>
+                      </a:fillRef>
+                      <a:effectRef idx="0">
+                        <a:schemeClr val="accent1"/>
+                      </a:effectRef>
+                      <a:fontRef idx="minor">
+                        <a:schemeClr val="lt1"/>
+                      </a:fontRef>
+                    </p:style>
+                    <p:txBody>
+                      <a:bodyPr rtlCol="0" anchor="ctr"/>
+                      <a:lstStyle/>
+                      <a:p>
+                        <a:pPr algn="ctr"/>
+                        <a:r>
+                          <a:rPr lang="fr-FR" dirty="0" err="1">
+                            <a:latin typeface="Tenorite" panose="00000500000000000000" pitchFamily="2" charset="0"/>
+                          </a:rPr>
+                          <a:t>Grafana</a:t>
+                        </a:r>
+                        <a:endParaRPr lang="fr-FR" dirty="0">
+                          <a:latin typeface="Tenorite" panose="00000500000000000000" pitchFamily="2" charset="0"/>
+                        </a:endParaRPr>
+                      </a:p>
+                    </p:txBody>
+                  </p:sp>
+                </p:grpSp>
                 <p:sp>
                   <p:nvSpPr>
-                    <p:cNvPr id="7" name="Rectangle : coins arrondis 6">
+                    <p:cNvPr id="22" name="Rectangle : coins arrondis 21">
                       <a:extLst>
                         <a:ext uri="{FF2B5EF4-FFF2-40B4-BE49-F238E27FC236}">
-                          <a16:creationId xmlns:a16="http://schemas.microsoft.com/office/drawing/2014/main" id="{CD476A8C-A792-ACFA-E3C1-D9FBE6BDE7BD}"/>
+                          <a16:creationId xmlns:a16="http://schemas.microsoft.com/office/drawing/2014/main" id="{934836D0-D1E8-63B5-A0FB-E3DF086588BC}"/>
                         </a:ext>
                       </a:extLst>
                     </p:cNvPr>
@@ -6498,7 +6760,61 @@
                   </p:nvSpPr>
                   <p:spPr>
                     <a:xfrm>
-                      <a:off x="5148576" y="1197026"/>
+                      <a:off x="7622785" y="2820149"/>
+                      <a:ext cx="1427280" cy="658761"/>
+                    </a:xfrm>
+                    <a:prstGeom prst="roundRect">
+                      <a:avLst/>
+                    </a:prstGeom>
+                  </p:spPr>
+                  <p:style>
+                    <a:lnRef idx="2">
+                      <a:schemeClr val="accent1">
+                        <a:shade val="15000"/>
+                      </a:schemeClr>
+                    </a:lnRef>
+                    <a:fillRef idx="1">
+                      <a:schemeClr val="accent1"/>
+                    </a:fillRef>
+                    <a:effectRef idx="0">
+                      <a:schemeClr val="accent1"/>
+                    </a:effectRef>
+                    <a:fontRef idx="minor">
+                      <a:schemeClr val="lt1"/>
+                    </a:fontRef>
+                  </p:style>
+                  <p:txBody>
+                    <a:bodyPr rtlCol="0" anchor="ctr"/>
+                    <a:lstStyle/>
+                    <a:p>
+                      <a:pPr algn="ctr"/>
+                      <a:r>
+                        <a:rPr lang="fr-FR" dirty="0" err="1">
+                          <a:latin typeface="Tenorite" panose="00000500000000000000" pitchFamily="2" charset="0"/>
+                        </a:rPr>
+                        <a:t>Telephone</a:t>
+                      </a:r>
+                      <a:endParaRPr lang="fr-FR" dirty="0">
+                        <a:latin typeface="Tenorite" panose="00000500000000000000" pitchFamily="2" charset="0"/>
+                      </a:endParaRPr>
+                    </a:p>
+                  </p:txBody>
+                </p:sp>
+                <p:sp>
+                  <p:nvSpPr>
+                    <p:cNvPr id="23" name="Rectangle : coins arrondis 22">
+                      <a:extLst>
+                        <a:ext uri="{FF2B5EF4-FFF2-40B4-BE49-F238E27FC236}">
+                          <a16:creationId xmlns:a16="http://schemas.microsoft.com/office/drawing/2014/main" id="{AAED79A8-9DB1-7881-1A54-F001F46BCE36}"/>
+                        </a:ext>
+                      </a:extLst>
+                    </p:cNvPr>
+                    <p:cNvSpPr/>
+                    <p:nvPr/>
+                  </p:nvSpPr>
+                  <p:spPr>
+                    <a:xfrm>
+                      <a:off x="2211403" y="1954346"/>
                       <a:ext cx="1394043" cy="658761"/>
                     </a:xfrm>
                     <a:prstGeom prst="roundRect">
@@ -6530,30 +6846,30 @@
                         <a:rPr lang="fr-FR" dirty="0">
                           <a:latin typeface="Tenorite" panose="00000500000000000000" pitchFamily="2" charset="0"/>
                         </a:rPr>
-                        <a:t>Relay</a:t>
+                        <a:t>GPS</a:t>
                       </a:r>
                     </a:p>
                   </p:txBody>
                 </p:sp>
                 <p:cxnSp>
                   <p:nvCxnSpPr>
-                    <p:cNvPr id="10" name="Connecteur droit avec flèche 9">
+                    <p:cNvPr id="24" name="Connecteur droit avec flèche 23">
                       <a:extLst>
                         <a:ext uri="{FF2B5EF4-FFF2-40B4-BE49-F238E27FC236}">
-                          <a16:creationId xmlns:a16="http://schemas.microsoft.com/office/drawing/2014/main" id="{E986E018-FEA9-7C39-C865-4D2B6ABE3CCC}"/>
+                          <a16:creationId xmlns:a16="http://schemas.microsoft.com/office/drawing/2014/main" id="{17C27FE4-E6CD-B109-A30F-4E50BEA871E6}"/>
                         </a:ext>
                       </a:extLst>
                     </p:cNvPr>
                     <p:cNvCxnSpPr>
                       <a:cxnSpLocks/>
-                      <a:endCxn id="12" idx="1"/>
+                      <a:stCxn id="23" idx="3"/>
                     </p:cNvCxnSpPr>
                     <p:nvPr/>
                   </p:nvCxnSpPr>
                   <p:spPr>
                     <a:xfrm flipV="1">
-                      <a:off x="6542619" y="705590"/>
-                      <a:ext cx="1229253" cy="692202"/>
+                      <a:off x="3605446" y="2273893"/>
+                      <a:ext cx="1394043" cy="9834"/>
                     </a:xfrm>
                     <a:prstGeom prst="straightConnector1">
                       <a:avLst/>
@@ -6577,77 +6893,25 @@
                     </a:fontRef>
                   </p:style>
                 </p:cxnSp>
-                <p:sp>
-                  <p:nvSpPr>
-                    <p:cNvPr id="12" name="Rectangle : coins arrondis 11">
+                <p:cxnSp>
+                  <p:nvCxnSpPr>
+                    <p:cNvPr id="28" name="Connecteur droit avec flèche 27">
                       <a:extLst>
                         <a:ext uri="{FF2B5EF4-FFF2-40B4-BE49-F238E27FC236}">
-                          <a16:creationId xmlns:a16="http://schemas.microsoft.com/office/drawing/2014/main" id="{86C6F40D-74EA-EC28-3291-681F43E6B80E}"/>
-                        </a:ext>
-                      </a:extLst>
-                    </p:cNvPr>
-                    <p:cNvSpPr/>
-                    <p:nvPr/>
-                  </p:nvSpPr>
-                  <p:spPr>
-                    <a:xfrm>
-                      <a:off x="7771872" y="376209"/>
-                      <a:ext cx="1427280" cy="658761"/>
-                    </a:xfrm>
-                    <a:prstGeom prst="roundRect">
-                      <a:avLst/>
-                    </a:prstGeom>
-                  </p:spPr>
-                  <p:style>
-                    <a:lnRef idx="2">
-                      <a:schemeClr val="accent1">
-                        <a:shade val="15000"/>
-                      </a:schemeClr>
-                    </a:lnRef>
-                    <a:fillRef idx="1">
-                      <a:schemeClr val="accent1"/>
-                    </a:fillRef>
-                    <a:effectRef idx="0">
-                      <a:schemeClr val="accent1"/>
-                    </a:effectRef>
-                    <a:fontRef idx="minor">
-                      <a:schemeClr val="lt1"/>
-                    </a:fontRef>
-                  </p:style>
-                  <p:txBody>
-                    <a:bodyPr rtlCol="0" anchor="ctr"/>
-                    <a:lstStyle/>
-                    <a:p>
-                      <a:pPr algn="ctr"/>
-                      <a:r>
-                        <a:rPr lang="fr-FR" dirty="0">
-                          <a:latin typeface="Tenorite" panose="00000500000000000000" pitchFamily="2" charset="0"/>
-                        </a:rPr>
-                        <a:t>Satellite</a:t>
-                      </a:r>
-                    </a:p>
-                  </p:txBody>
-                </p:sp>
-                <p:cxnSp>
-                  <p:nvCxnSpPr>
-                    <p:cNvPr id="16" name="Connecteur droit avec flèche 15">
-                      <a:extLst>
-                        <a:ext uri="{FF2B5EF4-FFF2-40B4-BE49-F238E27FC236}">
-                          <a16:creationId xmlns:a16="http://schemas.microsoft.com/office/drawing/2014/main" id="{E19834EB-DDBC-F9EC-58FE-580255D485A0}"/>
+                          <a16:creationId xmlns:a16="http://schemas.microsoft.com/office/drawing/2014/main" id="{F09066A2-3312-F87F-96C6-9A931BEF468C}"/>
                         </a:ext>
                       </a:extLst>
                     </p:cNvPr>
                     <p:cNvCxnSpPr>
                       <a:cxnSpLocks/>
-                      <a:stCxn id="2" idx="3"/>
-                      <a:endCxn id="17" idx="1"/>
+                      <a:endCxn id="22" idx="1"/>
                     </p:cNvCxnSpPr>
                     <p:nvPr/>
                   </p:nvCxnSpPr>
                   <p:spPr>
-                    <a:xfrm flipV="1">
-                      <a:off x="11390400" y="694256"/>
-                      <a:ext cx="926741" cy="6060"/>
+                    <a:xfrm>
+                      <a:off x="6378138" y="2457327"/>
+                      <a:ext cx="1244647" cy="692203"/>
                     </a:xfrm>
                     <a:prstGeom prst="straightConnector1">
                       <a:avLst/>
@@ -6671,257 +6935,209 @@
                     </a:fontRef>
                   </p:style>
                 </p:cxnSp>
-                <p:sp>
-                  <p:nvSpPr>
-                    <p:cNvPr id="17" name="Rectangle : coins arrondis 16">
-                      <a:extLst>
-                        <a:ext uri="{FF2B5EF4-FFF2-40B4-BE49-F238E27FC236}">
-                          <a16:creationId xmlns:a16="http://schemas.microsoft.com/office/drawing/2014/main" id="{57661EC9-CC12-3D47-9391-AA97243A10CB}"/>
-                        </a:ext>
-                      </a:extLst>
-                    </p:cNvPr>
-                    <p:cNvSpPr/>
-                    <p:nvPr/>
-                  </p:nvSpPr>
-                  <p:spPr>
-                    <a:xfrm>
-                      <a:off x="12317141" y="364875"/>
-                      <a:ext cx="1465424" cy="658761"/>
-                    </a:xfrm>
-                    <a:prstGeom prst="roundRect">
-                      <a:avLst/>
-                    </a:prstGeom>
-                  </p:spPr>
-                  <p:style>
-                    <a:lnRef idx="2">
-                      <a:schemeClr val="accent1">
-                        <a:shade val="15000"/>
-                      </a:schemeClr>
-                    </a:lnRef>
-                    <a:fillRef idx="1">
-                      <a:schemeClr val="accent1"/>
-                    </a:fillRef>
-                    <a:effectRef idx="0">
-                      <a:schemeClr val="accent1"/>
-                    </a:effectRef>
-                    <a:fontRef idx="minor">
-                      <a:schemeClr val="lt1"/>
-                    </a:fontRef>
-                  </p:style>
-                  <p:txBody>
-                    <a:bodyPr rtlCol="0" anchor="ctr"/>
-                    <a:lstStyle/>
-                    <a:p>
-                      <a:pPr algn="ctr"/>
-                      <a:r>
-                        <a:rPr lang="fr-FR" dirty="0" err="1">
-                          <a:latin typeface="Tenorite" panose="00000500000000000000" pitchFamily="2" charset="0"/>
-                        </a:rPr>
-                        <a:t>Grafana</a:t>
-                      </a:r>
-                      <a:endParaRPr lang="fr-FR" dirty="0">
-                        <a:latin typeface="Tenorite" panose="00000500000000000000" pitchFamily="2" charset="0"/>
-                      </a:endParaRPr>
-                    </a:p>
-                  </p:txBody>
-                </p:sp>
               </p:grpSp>
               <p:sp>
                 <p:nvSpPr>
-                  <p:cNvPr id="22" name="Rectangle : coins arrondis 21">
+                  <p:cNvPr id="33" name="ZoneTexte 32">
                     <a:extLst>
                       <a:ext uri="{FF2B5EF4-FFF2-40B4-BE49-F238E27FC236}">
-                        <a16:creationId xmlns:a16="http://schemas.microsoft.com/office/drawing/2014/main" id="{934836D0-D1E8-63B5-A0FB-E3DF086588BC}"/>
+                        <a16:creationId xmlns:a16="http://schemas.microsoft.com/office/drawing/2014/main" id="{3E554FAC-A7BC-6681-6FD7-9EBCA9610BC2}"/>
                       </a:ext>
                     </a:extLst>
                   </p:cNvPr>
-                  <p:cNvSpPr/>
+                  <p:cNvSpPr txBox="1"/>
                   <p:nvPr/>
                 </p:nvSpPr>
                 <p:spPr>
                   <a:xfrm>
-                    <a:off x="7622785" y="2820149"/>
-                    <a:ext cx="1427280" cy="658761"/>
+                    <a:off x="2700985" y="2381639"/>
+                    <a:ext cx="769978" cy="369332"/>
                   </a:xfrm>
-                  <a:prstGeom prst="roundRect">
+                  <a:prstGeom prst="rect">
                     <a:avLst/>
                   </a:prstGeom>
+                  <a:noFill/>
                 </p:spPr>
-                <p:style>
-                  <a:lnRef idx="2">
-                    <a:schemeClr val="accent1">
-                      <a:shade val="15000"/>
-                    </a:schemeClr>
-                  </a:lnRef>
-                  <a:fillRef idx="1">
-                    <a:schemeClr val="accent1"/>
-                  </a:fillRef>
-                  <a:effectRef idx="0">
-                    <a:schemeClr val="accent1"/>
-                  </a:effectRef>
-                  <a:fontRef idx="minor">
-                    <a:schemeClr val="lt1"/>
-                  </a:fontRef>
-                </p:style>
                 <p:txBody>
-                  <a:bodyPr rtlCol="0" anchor="ctr"/>
+                  <a:bodyPr wrap="square" rtlCol="0">
+                    <a:spAutoFit/>
+                  </a:bodyPr>
                   <a:lstStyle/>
                   <a:p>
-                    <a:pPr algn="ctr"/>
                     <a:r>
-                      <a:rPr lang="fr-FR" dirty="0" err="1">
+                      <a:rPr lang="fr-FR" dirty="0">
                         <a:latin typeface="Tenorite" panose="00000500000000000000" pitchFamily="2" charset="0"/>
                       </a:rPr>
-                      <a:t>Telephone</a:t>
+                      <a:t>UART</a:t>
                     </a:r>
-                    <a:endParaRPr lang="fr-FR" dirty="0">
-                      <a:latin typeface="Tenorite" panose="00000500000000000000" pitchFamily="2" charset="0"/>
-                    </a:endParaRPr>
                   </a:p>
                 </p:txBody>
               </p:sp>
               <p:sp>
                 <p:nvSpPr>
-                  <p:cNvPr id="23" name="Rectangle : coins arrondis 22">
+                  <p:cNvPr id="38" name="ZoneTexte 37">
                     <a:extLst>
                       <a:ext uri="{FF2B5EF4-FFF2-40B4-BE49-F238E27FC236}">
-                        <a16:creationId xmlns:a16="http://schemas.microsoft.com/office/drawing/2014/main" id="{AAED79A8-9DB1-7881-1A54-F001F46BCE36}"/>
+                        <a16:creationId xmlns:a16="http://schemas.microsoft.com/office/drawing/2014/main" id="{2F727BA6-BA2D-5E24-C8DC-564DAF3464CA}"/>
                       </a:ext>
                     </a:extLst>
                   </p:cNvPr>
-                  <p:cNvSpPr/>
+                  <p:cNvSpPr txBox="1"/>
                   <p:nvPr/>
                 </p:nvSpPr>
                 <p:spPr>
                   <a:xfrm>
-                    <a:off x="2211403" y="1954346"/>
-                    <a:ext cx="1394043" cy="658761"/>
+                    <a:off x="8107002" y="1553832"/>
+                    <a:ext cx="944810" cy="369332"/>
                   </a:xfrm>
-                  <a:prstGeom prst="roundRect">
+                  <a:prstGeom prst="rect">
                     <a:avLst/>
                   </a:prstGeom>
+                  <a:noFill/>
                 </p:spPr>
-                <p:style>
-                  <a:lnRef idx="2">
-                    <a:schemeClr val="accent1">
-                      <a:shade val="15000"/>
-                    </a:schemeClr>
-                  </a:lnRef>
-                  <a:fillRef idx="1">
-                    <a:schemeClr val="accent1"/>
-                  </a:fillRef>
-                  <a:effectRef idx="0">
-                    <a:schemeClr val="accent1"/>
-                  </a:effectRef>
-                  <a:fontRef idx="minor">
-                    <a:schemeClr val="lt1"/>
-                  </a:fontRef>
-                </p:style>
                 <p:txBody>
-                  <a:bodyPr rtlCol="0" anchor="ctr"/>
+                  <a:bodyPr wrap="square" rtlCol="0">
+                    <a:spAutoFit/>
+                  </a:bodyPr>
                   <a:lstStyle/>
                   <a:p>
-                    <a:pPr algn="ctr"/>
                     <a:r>
                       <a:rPr lang="fr-FR" dirty="0">
                         <a:latin typeface="Tenorite" panose="00000500000000000000" pitchFamily="2" charset="0"/>
                       </a:rPr>
-                      <a:t>GPS</a:t>
+                      <a:t>MQTT</a:t>
                     </a:r>
                   </a:p>
                 </p:txBody>
               </p:sp>
-              <p:cxnSp>
-                <p:nvCxnSpPr>
-                  <p:cNvPr id="24" name="Connecteur droit avec flèche 23">
+              <p:sp>
+                <p:nvSpPr>
+                  <p:cNvPr id="39" name="ZoneTexte 38">
                     <a:extLst>
                       <a:ext uri="{FF2B5EF4-FFF2-40B4-BE49-F238E27FC236}">
-                        <a16:creationId xmlns:a16="http://schemas.microsoft.com/office/drawing/2014/main" id="{17C27FE4-E6CD-B109-A30F-4E50BEA871E6}"/>
+                        <a16:creationId xmlns:a16="http://schemas.microsoft.com/office/drawing/2014/main" id="{0FFB7880-94B9-A829-A6CD-F335B28C0C09}"/>
                       </a:ext>
                     </a:extLst>
                   </p:cNvPr>
-                  <p:cNvCxnSpPr>
-                    <a:cxnSpLocks/>
-                    <a:stCxn id="23" idx="3"/>
-                  </p:cNvCxnSpPr>
+                  <p:cNvSpPr txBox="1"/>
                   <p:nvPr/>
-                </p:nvCxnSpPr>
+                </p:nvSpPr>
                 <p:spPr>
-                  <a:xfrm flipV="1">
-                    <a:off x="3605446" y="2273893"/>
-                    <a:ext cx="1394043" cy="9834"/>
+                  <a:xfrm rot="19835771">
+                    <a:off x="5545642" y="2013355"/>
+                    <a:ext cx="769978" cy="369332"/>
                   </a:xfrm>
-                  <a:prstGeom prst="straightConnector1">
+                  <a:prstGeom prst="rect">
                     <a:avLst/>
                   </a:prstGeom>
-                  <a:ln w="28575">
-                    <a:tailEnd type="triangle"/>
-                  </a:ln>
+                  <a:noFill/>
                 </p:spPr>
-                <p:style>
-                  <a:lnRef idx="1">
-                    <a:schemeClr val="accent1"/>
-                  </a:lnRef>
-                  <a:fillRef idx="0">
-                    <a:schemeClr val="accent1"/>
-                  </a:fillRef>
-                  <a:effectRef idx="0">
-                    <a:schemeClr val="accent1"/>
-                  </a:effectRef>
-                  <a:fontRef idx="minor">
-                    <a:schemeClr val="tx1"/>
-                  </a:fontRef>
-                </p:style>
-              </p:cxnSp>
-              <p:cxnSp>
-                <p:nvCxnSpPr>
-                  <p:cNvPr id="28" name="Connecteur droit avec flèche 27">
+                <p:txBody>
+                  <a:bodyPr wrap="square" rtlCol="0">
+                    <a:spAutoFit/>
+                  </a:bodyPr>
+                  <a:lstStyle/>
+                  <a:p>
+                    <a:r>
+                      <a:rPr lang="fr-FR" dirty="0">
+                        <a:latin typeface="Tenorite" panose="00000500000000000000" pitchFamily="2" charset="0"/>
+                      </a:rPr>
+                      <a:t>LoRa</a:t>
+                    </a:r>
+                  </a:p>
+                </p:txBody>
+              </p:sp>
+              <p:sp>
+                <p:nvSpPr>
+                  <p:cNvPr id="40" name="ZoneTexte 39">
                     <a:extLst>
                       <a:ext uri="{FF2B5EF4-FFF2-40B4-BE49-F238E27FC236}">
-                        <a16:creationId xmlns:a16="http://schemas.microsoft.com/office/drawing/2014/main" id="{F09066A2-3312-F87F-96C6-9A931BEF468C}"/>
+                        <a16:creationId xmlns:a16="http://schemas.microsoft.com/office/drawing/2014/main" id="{1022C5CA-BA6A-7B91-A8C6-F1A3A0B6CA88}"/>
                       </a:ext>
                     </a:extLst>
                   </p:cNvPr>
-                  <p:cNvCxnSpPr>
-                    <a:cxnSpLocks/>
-                    <a:endCxn id="22" idx="1"/>
-                  </p:cNvCxnSpPr>
+                  <p:cNvSpPr txBox="1"/>
                   <p:nvPr/>
-                </p:nvCxnSpPr>
+                </p:nvSpPr>
                 <p:spPr>
-                  <a:xfrm>
-                    <a:off x="6378138" y="2457327"/>
-                    <a:ext cx="1244647" cy="692203"/>
+                  <a:xfrm rot="1776879">
+                    <a:off x="5460903" y="3173729"/>
+                    <a:ext cx="769978" cy="369332"/>
                   </a:xfrm>
-                  <a:prstGeom prst="straightConnector1">
+                  <a:prstGeom prst="rect">
                     <a:avLst/>
                   </a:prstGeom>
-                  <a:ln w="28575">
-                    <a:tailEnd type="triangle"/>
-                  </a:ln>
+                  <a:noFill/>
                 </p:spPr>
-                <p:style>
-                  <a:lnRef idx="1">
-                    <a:schemeClr val="accent1"/>
-                  </a:lnRef>
-                  <a:fillRef idx="0">
-                    <a:schemeClr val="accent1"/>
-                  </a:fillRef>
-                  <a:effectRef idx="0">
-                    <a:schemeClr val="accent1"/>
-                  </a:effectRef>
-                  <a:fontRef idx="minor">
-                    <a:schemeClr val="tx1"/>
-                  </a:fontRef>
-                </p:style>
-              </p:cxnSp>
+                <p:txBody>
+                  <a:bodyPr wrap="square" rtlCol="0">
+                    <a:spAutoFit/>
+                  </a:bodyPr>
+                  <a:lstStyle/>
+                  <a:p>
+                    <a:r>
+                      <a:rPr lang="fr-FR" dirty="0">
+                        <a:latin typeface="Tenorite" panose="00000500000000000000" pitchFamily="2" charset="0"/>
+                      </a:rPr>
+                      <a:t>BLE</a:t>
+                    </a:r>
+                  </a:p>
+                </p:txBody>
+              </p:sp>
             </p:grpSp>
             <p:sp>
               <p:nvSpPr>
-                <p:cNvPr id="33" name="ZoneTexte 32">
+                <p:cNvPr id="42" name="Ellipse 41">
                   <a:extLst>
                     <a:ext uri="{FF2B5EF4-FFF2-40B4-BE49-F238E27FC236}">
-                      <a16:creationId xmlns:a16="http://schemas.microsoft.com/office/drawing/2014/main" id="{3E554FAC-A7BC-6681-6FD7-9EBCA9610BC2}"/>
+                      <a16:creationId xmlns:a16="http://schemas.microsoft.com/office/drawing/2014/main" id="{41143BCD-49EC-179B-6047-DB687DBF45FB}"/>
+                    </a:ext>
+                  </a:extLst>
+                </p:cNvPr>
+                <p:cNvSpPr/>
+                <p:nvPr/>
+              </p:nvSpPr>
+              <p:spPr>
+                <a:xfrm>
+                  <a:off x="735081" y="1559882"/>
+                  <a:ext cx="4808848" cy="1718089"/>
+                </a:xfrm>
+                <a:prstGeom prst="ellipse">
+                  <a:avLst/>
+                </a:prstGeom>
+                <a:noFill/>
+              </p:spPr>
+              <p:style>
+                <a:lnRef idx="2">
+                  <a:schemeClr val="accent1">
+                    <a:shade val="15000"/>
+                  </a:schemeClr>
+                </a:lnRef>
+                <a:fillRef idx="1">
+                  <a:schemeClr val="accent1"/>
+                </a:fillRef>
+                <a:effectRef idx="0">
+                  <a:schemeClr val="accent1"/>
+                </a:effectRef>
+                <a:fontRef idx="minor">
+                  <a:schemeClr val="lt1"/>
+                </a:fontRef>
+              </p:style>
+              <p:txBody>
+                <a:bodyPr rtlCol="0" anchor="ctr"/>
+                <a:lstStyle/>
+                <a:p>
+                  <a:pPr algn="ctr"/>
+                  <a:endParaRPr lang="fr-FR"/>
+                </a:p>
+              </p:txBody>
+            </p:sp>
+            <p:sp>
+              <p:nvSpPr>
+                <p:cNvPr id="43" name="ZoneTexte 42">
+                  <a:extLst>
+                    <a:ext uri="{FF2B5EF4-FFF2-40B4-BE49-F238E27FC236}">
+                      <a16:creationId xmlns:a16="http://schemas.microsoft.com/office/drawing/2014/main" id="{396360AF-7C9A-441C-ECC9-4F9064ACFE94}"/>
                     </a:ext>
                   </a:extLst>
                 </p:cNvPr>
@@ -6930,8 +7146,8 @@
               </p:nvSpPr>
               <p:spPr>
                 <a:xfrm>
-                  <a:off x="2700985" y="2381639"/>
-                  <a:ext cx="769978" cy="369332"/>
+                  <a:off x="2129285" y="1644390"/>
+                  <a:ext cx="2289207" cy="369332"/>
                 </a:xfrm>
                 <a:prstGeom prst="rect">
                   <a:avLst/>
@@ -6945,20 +7161,20 @@
                 <a:lstStyle/>
                 <a:p>
                   <a:r>
-                    <a:rPr lang="fr-FR" dirty="0">
+                    <a:rPr lang="fr-FR" b="1" dirty="0">
                       <a:latin typeface="Tenorite" panose="00000500000000000000" pitchFamily="2" charset="0"/>
                     </a:rPr>
-                    <a:t>UART</a:t>
+                    <a:t>Système Embarquée</a:t>
                   </a:r>
                 </a:p>
               </p:txBody>
             </p:sp>
             <p:sp>
               <p:nvSpPr>
-                <p:cNvPr id="38" name="ZoneTexte 37">
+                <p:cNvPr id="47" name="ZoneTexte 46">
                   <a:extLst>
                     <a:ext uri="{FF2B5EF4-FFF2-40B4-BE49-F238E27FC236}">
-                      <a16:creationId xmlns:a16="http://schemas.microsoft.com/office/drawing/2014/main" id="{2F727BA6-BA2D-5E24-C8DC-564DAF3464CA}"/>
+                      <a16:creationId xmlns:a16="http://schemas.microsoft.com/office/drawing/2014/main" id="{6992E651-7282-91C5-1C7D-A34448463D55}"/>
                     </a:ext>
                   </a:extLst>
                 </p:cNvPr>
@@ -6967,8 +7183,8 @@
               </p:nvSpPr>
               <p:spPr>
                 <a:xfrm>
-                  <a:off x="8107002" y="1553832"/>
-                  <a:ext cx="944810" cy="369332"/>
+                  <a:off x="10769694" y="965033"/>
+                  <a:ext cx="2082153" cy="369332"/>
                 </a:xfrm>
                 <a:prstGeom prst="rect">
                   <a:avLst/>
@@ -6981,21 +7197,22 @@
                 </a:bodyPr>
                 <a:lstStyle/>
                 <a:p>
+                  <a:pPr algn="ctr"/>
                   <a:r>
-                    <a:rPr lang="fr-FR" dirty="0">
+                    <a:rPr lang="fr-FR" b="1" dirty="0">
                       <a:latin typeface="Tenorite" panose="00000500000000000000" pitchFamily="2" charset="0"/>
                     </a:rPr>
-                    <a:t>MQTT</a:t>
+                    <a:t>Visualisation</a:t>
                   </a:r>
                 </a:p>
               </p:txBody>
             </p:sp>
             <p:sp>
               <p:nvSpPr>
-                <p:cNvPr id="39" name="ZoneTexte 38">
+                <p:cNvPr id="48" name="ZoneTexte 47">
                   <a:extLst>
                     <a:ext uri="{FF2B5EF4-FFF2-40B4-BE49-F238E27FC236}">
-                      <a16:creationId xmlns:a16="http://schemas.microsoft.com/office/drawing/2014/main" id="{0FFB7880-94B9-A829-A6CD-F335B28C0C09}"/>
+                      <a16:creationId xmlns:a16="http://schemas.microsoft.com/office/drawing/2014/main" id="{E7C6688D-0F97-DE70-B01F-8DA49D000B96}"/>
                     </a:ext>
                   </a:extLst>
                 </p:cNvPr>
@@ -7003,9 +7220,9 @@
                 <p:nvPr/>
               </p:nvSpPr>
               <p:spPr>
-                <a:xfrm rot="19835771">
-                  <a:off x="5545642" y="2013355"/>
-                  <a:ext cx="769978" cy="369332"/>
+                <a:xfrm>
+                  <a:off x="8366759" y="943949"/>
+                  <a:ext cx="2082153" cy="369332"/>
                 </a:xfrm>
                 <a:prstGeom prst="rect">
                   <a:avLst/>
@@ -7018,317 +7235,121 @@
                 </a:bodyPr>
                 <a:lstStyle/>
                 <a:p>
+                  <a:pPr algn="ctr"/>
                   <a:r>
-                    <a:rPr lang="fr-FR" dirty="0">
+                    <a:rPr lang="fr-FR" b="1" dirty="0">
                       <a:latin typeface="Tenorite" panose="00000500000000000000" pitchFamily="2" charset="0"/>
                     </a:rPr>
-                    <a:t>LoRa</a:t>
-                  </a:r>
-                </a:p>
-              </p:txBody>
-            </p:sp>
-            <p:sp>
-              <p:nvSpPr>
-                <p:cNvPr id="40" name="ZoneTexte 39">
-                  <a:extLst>
-                    <a:ext uri="{FF2B5EF4-FFF2-40B4-BE49-F238E27FC236}">
-                      <a16:creationId xmlns:a16="http://schemas.microsoft.com/office/drawing/2014/main" id="{1022C5CA-BA6A-7B91-A8C6-F1A3A0B6CA88}"/>
-                    </a:ext>
-                  </a:extLst>
-                </p:cNvPr>
-                <p:cNvSpPr txBox="1"/>
-                <p:nvPr/>
-              </p:nvSpPr>
-              <p:spPr>
-                <a:xfrm rot="1776879">
-                  <a:off x="5460903" y="3173729"/>
-                  <a:ext cx="769978" cy="369332"/>
-                </a:xfrm>
-                <a:prstGeom prst="rect">
-                  <a:avLst/>
-                </a:prstGeom>
-                <a:noFill/>
-              </p:spPr>
-              <p:txBody>
-                <a:bodyPr wrap="square" rtlCol="0">
-                  <a:spAutoFit/>
-                </a:bodyPr>
-                <a:lstStyle/>
-                <a:p>
-                  <a:r>
-                    <a:rPr lang="fr-FR" dirty="0">
-                      <a:latin typeface="Tenorite" panose="00000500000000000000" pitchFamily="2" charset="0"/>
-                    </a:rPr>
-                    <a:t>BLE</a:t>
+                    <a:t>Traitement</a:t>
                   </a:r>
                 </a:p>
               </p:txBody>
             </p:sp>
           </p:grpSp>
-          <p:sp>
-            <p:nvSpPr>
-              <p:cNvPr id="42" name="Ellipse 41">
-                <a:extLst>
-                  <a:ext uri="{FF2B5EF4-FFF2-40B4-BE49-F238E27FC236}">
-                    <a16:creationId xmlns:a16="http://schemas.microsoft.com/office/drawing/2014/main" id="{41143BCD-49EC-179B-6047-DB687DBF45FB}"/>
-                  </a:ext>
-                </a:extLst>
-              </p:cNvPr>
-              <p:cNvSpPr/>
-              <p:nvPr/>
-            </p:nvSpPr>
-            <p:spPr>
-              <a:xfrm>
-                <a:off x="735081" y="1559882"/>
-                <a:ext cx="4808848" cy="1718089"/>
-              </a:xfrm>
-              <a:prstGeom prst="ellipse">
-                <a:avLst/>
-              </a:prstGeom>
-              <a:noFill/>
-            </p:spPr>
-            <p:style>
-              <a:lnRef idx="2">
-                <a:schemeClr val="accent1">
-                  <a:shade val="15000"/>
-                </a:schemeClr>
-              </a:lnRef>
-              <a:fillRef idx="1">
-                <a:schemeClr val="accent1"/>
-              </a:fillRef>
-              <a:effectRef idx="0">
-                <a:schemeClr val="accent1"/>
-              </a:effectRef>
-              <a:fontRef idx="minor">
-                <a:schemeClr val="lt1"/>
-              </a:fontRef>
-            </p:style>
-            <p:txBody>
-              <a:bodyPr rtlCol="0" anchor="ctr"/>
-              <a:lstStyle/>
-              <a:p>
-                <a:pPr algn="ctr"/>
-                <a:endParaRPr lang="fr-FR"/>
-              </a:p>
-            </p:txBody>
-          </p:sp>
-          <p:sp>
-            <p:nvSpPr>
-              <p:cNvPr id="43" name="ZoneTexte 42">
-                <a:extLst>
-                  <a:ext uri="{FF2B5EF4-FFF2-40B4-BE49-F238E27FC236}">
-                    <a16:creationId xmlns:a16="http://schemas.microsoft.com/office/drawing/2014/main" id="{396360AF-7C9A-441C-ECC9-4F9064ACFE94}"/>
-                  </a:ext>
-                </a:extLst>
-              </p:cNvPr>
-              <p:cNvSpPr txBox="1"/>
-              <p:nvPr/>
-            </p:nvSpPr>
-            <p:spPr>
-              <a:xfrm>
-                <a:off x="2129285" y="1644390"/>
-                <a:ext cx="2289207" cy="369332"/>
-              </a:xfrm>
-              <a:prstGeom prst="rect">
-                <a:avLst/>
-              </a:prstGeom>
-              <a:noFill/>
-            </p:spPr>
-            <p:txBody>
-              <a:bodyPr wrap="square" rtlCol="0">
-                <a:spAutoFit/>
-              </a:bodyPr>
-              <a:lstStyle/>
-              <a:p>
-                <a:r>
-                  <a:rPr lang="fr-FR" b="1" dirty="0">
-                    <a:latin typeface="Tenorite" panose="00000500000000000000" pitchFamily="2" charset="0"/>
-                  </a:rPr>
-                  <a:t>Système Embarquée</a:t>
-                </a:r>
-              </a:p>
-            </p:txBody>
-          </p:sp>
-          <p:sp>
-            <p:nvSpPr>
-              <p:cNvPr id="47" name="ZoneTexte 46">
-                <a:extLst>
-                  <a:ext uri="{FF2B5EF4-FFF2-40B4-BE49-F238E27FC236}">
-                    <a16:creationId xmlns:a16="http://schemas.microsoft.com/office/drawing/2014/main" id="{6992E651-7282-91C5-1C7D-A34448463D55}"/>
-                  </a:ext>
-                </a:extLst>
-              </p:cNvPr>
-              <p:cNvSpPr txBox="1"/>
-              <p:nvPr/>
-            </p:nvSpPr>
-            <p:spPr>
-              <a:xfrm>
-                <a:off x="10769694" y="965033"/>
-                <a:ext cx="2082153" cy="369332"/>
-              </a:xfrm>
-              <a:prstGeom prst="rect">
-                <a:avLst/>
-              </a:prstGeom>
-              <a:noFill/>
-            </p:spPr>
-            <p:txBody>
-              <a:bodyPr wrap="square" rtlCol="0">
-                <a:spAutoFit/>
-              </a:bodyPr>
-              <a:lstStyle/>
-              <a:p>
-                <a:pPr algn="ctr"/>
-                <a:r>
-                  <a:rPr lang="fr-FR" b="1" dirty="0">
-                    <a:latin typeface="Tenorite" panose="00000500000000000000" pitchFamily="2" charset="0"/>
-                  </a:rPr>
-                  <a:t>Visualisation</a:t>
-                </a:r>
-              </a:p>
-            </p:txBody>
-          </p:sp>
-          <p:sp>
-            <p:nvSpPr>
-              <p:cNvPr id="48" name="ZoneTexte 47">
-                <a:extLst>
-                  <a:ext uri="{FF2B5EF4-FFF2-40B4-BE49-F238E27FC236}">
-                    <a16:creationId xmlns:a16="http://schemas.microsoft.com/office/drawing/2014/main" id="{E7C6688D-0F97-DE70-B01F-8DA49D000B96}"/>
-                  </a:ext>
-                </a:extLst>
-              </p:cNvPr>
-              <p:cNvSpPr txBox="1"/>
-              <p:nvPr/>
-            </p:nvSpPr>
-            <p:spPr>
-              <a:xfrm>
-                <a:off x="8366759" y="943949"/>
-                <a:ext cx="2082153" cy="369332"/>
-              </a:xfrm>
-              <a:prstGeom prst="rect">
-                <a:avLst/>
-              </a:prstGeom>
-              <a:noFill/>
-            </p:spPr>
-            <p:txBody>
-              <a:bodyPr wrap="square" rtlCol="0">
-                <a:spAutoFit/>
-              </a:bodyPr>
-              <a:lstStyle/>
-              <a:p>
-                <a:pPr algn="ctr"/>
-                <a:r>
-                  <a:rPr lang="fr-FR" b="1" dirty="0">
-                    <a:latin typeface="Tenorite" panose="00000500000000000000" pitchFamily="2" charset="0"/>
-                  </a:rPr>
-                  <a:t>Traitement</a:t>
-                </a:r>
-              </a:p>
-            </p:txBody>
-          </p:sp>
         </p:grpSp>
+        <p:sp>
+          <p:nvSpPr>
+            <p:cNvPr id="2" name="Rectangle : coins arrondis 1">
+              <a:extLst>
+                <a:ext uri="{FF2B5EF4-FFF2-40B4-BE49-F238E27FC236}">
+                  <a16:creationId xmlns:a16="http://schemas.microsoft.com/office/drawing/2014/main" id="{BBCD94BD-1854-2DDC-3CC3-2B763B6B128B}"/>
+                </a:ext>
+              </a:extLst>
+            </p:cNvPr>
+            <p:cNvSpPr/>
+            <p:nvPr/>
+          </p:nvSpPr>
+          <p:spPr>
+            <a:xfrm>
+              <a:off x="7965770" y="1898447"/>
+              <a:ext cx="1427280" cy="658761"/>
+            </a:xfrm>
+            <a:prstGeom prst="roundRect">
+              <a:avLst/>
+            </a:prstGeom>
+          </p:spPr>
+          <p:style>
+            <a:lnRef idx="2">
+              <a:schemeClr val="accent1">
+                <a:shade val="15000"/>
+              </a:schemeClr>
+            </a:lnRef>
+            <a:fillRef idx="1">
+              <a:schemeClr val="accent1"/>
+            </a:fillRef>
+            <a:effectRef idx="0">
+              <a:schemeClr val="accent1"/>
+            </a:effectRef>
+            <a:fontRef idx="minor">
+              <a:schemeClr val="lt1"/>
+            </a:fontRef>
+          </p:style>
+          <p:txBody>
+            <a:bodyPr rtlCol="0" anchor="ctr"/>
+            <a:lstStyle/>
+            <a:p>
+              <a:pPr algn="ctr"/>
+              <a:r>
+                <a:rPr lang="fr-FR" dirty="0">
+                  <a:latin typeface="Tenorite" panose="00000500000000000000" pitchFamily="2" charset="0"/>
+                </a:rPr>
+                <a:t>Node-</a:t>
+              </a:r>
+              <a:r>
+                <a:rPr lang="fr-FR" dirty="0" err="1">
+                  <a:latin typeface="Tenorite" panose="00000500000000000000" pitchFamily="2" charset="0"/>
+                </a:rPr>
+                <a:t>red</a:t>
+              </a:r>
+              <a:endParaRPr lang="fr-FR" dirty="0">
+                <a:latin typeface="Tenorite" panose="00000500000000000000" pitchFamily="2" charset="0"/>
+              </a:endParaRPr>
+            </a:p>
+          </p:txBody>
+        </p:sp>
+        <p:cxnSp>
+          <p:nvCxnSpPr>
+            <p:cNvPr id="14" name="Connecteur droit avec flèche 13">
+              <a:extLst>
+                <a:ext uri="{FF2B5EF4-FFF2-40B4-BE49-F238E27FC236}">
+                  <a16:creationId xmlns:a16="http://schemas.microsoft.com/office/drawing/2014/main" id="{74B4C6A1-AD8B-CD97-E4BE-7E32BE0E462C}"/>
+                </a:ext>
+              </a:extLst>
+            </p:cNvPr>
+            <p:cNvCxnSpPr>
+              <a:cxnSpLocks/>
+              <a:endCxn id="2" idx="1"/>
+            </p:cNvCxnSpPr>
+            <p:nvPr/>
+          </p:nvCxnSpPr>
+          <p:spPr>
+            <a:xfrm>
+              <a:off x="7181967" y="2218015"/>
+              <a:ext cx="783803" cy="9813"/>
+            </a:xfrm>
+            <a:prstGeom prst="straightConnector1">
+              <a:avLst/>
+            </a:prstGeom>
+            <a:ln w="28575">
+              <a:tailEnd type="triangle"/>
+            </a:ln>
+          </p:spPr>
+          <p:style>
+            <a:lnRef idx="1">
+              <a:schemeClr val="accent1"/>
+            </a:lnRef>
+            <a:fillRef idx="0">
+              <a:schemeClr val="accent1"/>
+            </a:fillRef>
+            <a:effectRef idx="0">
+              <a:schemeClr val="accent1"/>
+            </a:effectRef>
+            <a:fontRef idx="minor">
+              <a:schemeClr val="tx1"/>
+            </a:fontRef>
+          </p:style>
+        </p:cxnSp>
       </p:grpSp>
-      <p:sp>
-        <p:nvSpPr>
-          <p:cNvPr id="2" name="Rectangle : coins arrondis 1">
-            <a:extLst>
-              <a:ext uri="{FF2B5EF4-FFF2-40B4-BE49-F238E27FC236}">
-                <a16:creationId xmlns:a16="http://schemas.microsoft.com/office/drawing/2014/main" id="{BBCD94BD-1854-2DDC-3CC3-2B763B6B128B}"/>
-              </a:ext>
-            </a:extLst>
-          </p:cNvPr>
-          <p:cNvSpPr/>
-          <p:nvPr/>
-        </p:nvSpPr>
-        <p:spPr>
-          <a:xfrm>
-            <a:off x="7965770" y="1898447"/>
-            <a:ext cx="1427280" cy="658761"/>
-          </a:xfrm>
-          <a:prstGeom prst="roundRect">
-            <a:avLst/>
-          </a:prstGeom>
-        </p:spPr>
-        <p:style>
-          <a:lnRef idx="2">
-            <a:schemeClr val="accent1">
-              <a:shade val="15000"/>
-            </a:schemeClr>
-          </a:lnRef>
-          <a:fillRef idx="1">
-            <a:schemeClr val="accent1"/>
-          </a:fillRef>
-          <a:effectRef idx="0">
-            <a:schemeClr val="accent1"/>
-          </a:effectRef>
-          <a:fontRef idx="minor">
-            <a:schemeClr val="lt1"/>
-          </a:fontRef>
-        </p:style>
-        <p:txBody>
-          <a:bodyPr rtlCol="0" anchor="ctr"/>
-          <a:lstStyle/>
-          <a:p>
-            <a:pPr algn="ctr"/>
-            <a:r>
-              <a:rPr lang="fr-FR" dirty="0">
-                <a:latin typeface="Tenorite" panose="00000500000000000000" pitchFamily="2" charset="0"/>
-              </a:rPr>
-              <a:t>Node-</a:t>
-            </a:r>
-            <a:r>
-              <a:rPr lang="fr-FR" dirty="0" err="1">
-                <a:latin typeface="Tenorite" panose="00000500000000000000" pitchFamily="2" charset="0"/>
-              </a:rPr>
-              <a:t>red</a:t>
-            </a:r>
-            <a:endParaRPr lang="fr-FR" dirty="0">
-              <a:latin typeface="Tenorite" panose="00000500000000000000" pitchFamily="2" charset="0"/>
-            </a:endParaRPr>
-          </a:p>
-        </p:txBody>
-      </p:sp>
-      <p:cxnSp>
-        <p:nvCxnSpPr>
-          <p:cNvPr id="14" name="Connecteur droit avec flèche 13">
-            <a:extLst>
-              <a:ext uri="{FF2B5EF4-FFF2-40B4-BE49-F238E27FC236}">
-                <a16:creationId xmlns:a16="http://schemas.microsoft.com/office/drawing/2014/main" id="{74B4C6A1-AD8B-CD97-E4BE-7E32BE0E462C}"/>
-              </a:ext>
-            </a:extLst>
-          </p:cNvPr>
-          <p:cNvCxnSpPr>
-            <a:cxnSpLocks/>
-            <a:endCxn id="2" idx="1"/>
-          </p:cNvCxnSpPr>
-          <p:nvPr/>
-        </p:nvCxnSpPr>
-        <p:spPr>
-          <a:xfrm>
-            <a:off x="7181967" y="2218015"/>
-            <a:ext cx="783803" cy="9813"/>
-          </a:xfrm>
-          <a:prstGeom prst="straightConnector1">
-            <a:avLst/>
-          </a:prstGeom>
-          <a:ln w="28575">
-            <a:tailEnd type="triangle"/>
-          </a:ln>
-        </p:spPr>
-        <p:style>
-          <a:lnRef idx="1">
-            <a:schemeClr val="accent1"/>
-          </a:lnRef>
-          <a:fillRef idx="0">
-            <a:schemeClr val="accent1"/>
-          </a:fillRef>
-          <a:effectRef idx="0">
-            <a:schemeClr val="accent1"/>
-          </a:effectRef>
-          <a:fontRef idx="minor">
-            <a:schemeClr val="tx1"/>
-          </a:fontRef>
-        </p:style>
-      </p:cxnSp>
       <p:sp>
         <p:nvSpPr>
           <p:cNvPr id="15" name="ZoneTexte 14">
@@ -10800,6 +10821,15 @@
 </file>
 
 <file path=customXml/item1.xml><?xml version="1.0" encoding="utf-8"?>
+<?mso-contentType ?>
+<FormTemplates xmlns="http://schemas.microsoft.com/sharepoint/v3/contenttype/forms">
+  <Display>DocumentLibraryForm</Display>
+  <Edit>DocumentLibraryForm</Edit>
+  <New>DocumentLibraryForm</New>
+</FormTemplates>
+</file>
+
+<file path=customXml/item2.xml><?xml version="1.0" encoding="utf-8"?>
 <ct:contentTypeSchema xmlns:ct="http://schemas.microsoft.com/office/2006/metadata/contentType" xmlns:ma="http://schemas.microsoft.com/office/2006/metadata/properties/metaAttributes" ct:_="" ma:_="" ma:contentTypeName="Document" ma:contentTypeID="0x010100D1DBFDC516FB7D498F2708E0668661F7" ma:contentTypeVersion="15" ma:contentTypeDescription="Create a new document." ma:contentTypeScope="" ma:versionID="76190fd46b8ecc19c259073b19191ac1">
   <xsd:schema xmlns:xsd="http://www.w3.org/2001/XMLSchema" xmlns:xs="http://www.w3.org/2001/XMLSchema" xmlns:p="http://schemas.microsoft.com/office/2006/metadata/properties" xmlns:ns2="fd043017-6145-4171-ae53-4a2444b0f3a8" xmlns:ns3="ae4d9fed-4369-4efa-870f-7c4fbc625802" targetNamespace="http://schemas.microsoft.com/office/2006/metadata/properties" ma:root="true" ma:fieldsID="1923d3a5d954ca530e5d58ea92103f74" ns2:_="" ns3:_="">
     <xsd:import namespace="fd043017-6145-4171-ae53-4a2444b0f3a8"/>
@@ -11034,15 +11064,6 @@
 </ct:contentTypeSchema>
 </file>
 
-<file path=customXml/item2.xml><?xml version="1.0" encoding="utf-8"?>
-<?mso-contentType ?>
-<FormTemplates xmlns="http://schemas.microsoft.com/sharepoint/v3/contenttype/forms">
-  <Display>DocumentLibraryForm</Display>
-  <Edit>DocumentLibraryForm</Edit>
-  <New>DocumentLibraryForm</New>
-</FormTemplates>
-</file>
-
 <file path=customXml/item3.xml><?xml version="1.0" encoding="utf-8"?>
 <p:properties xmlns:p="http://schemas.microsoft.com/office/2006/metadata/properties" xmlns:xsi="http://www.w3.org/2001/XMLSchema-instance" xmlns:pc="http://schemas.microsoft.com/office/infopath/2007/PartnerControls">
   <documentManagement>
@@ -11055,6 +11076,14 @@
 </file>
 
 <file path=customXml/itemProps1.xml><?xml version="1.0" encoding="utf-8"?>
+<ds:datastoreItem xmlns:ds="http://schemas.openxmlformats.org/officeDocument/2006/customXml" ds:itemID="{90619B12-AFF5-4C5C-937B-0A7AB1969000}">
+  <ds:schemaRefs>
+    <ds:schemaRef ds:uri="http://schemas.microsoft.com/sharepoint/v3/contenttype/forms"/>
+  </ds:schemaRefs>
+</ds:datastoreItem>
+</file>
+
+<file path=customXml/itemProps2.xml><?xml version="1.0" encoding="utf-8"?>
 <ds:datastoreItem xmlns:ds="http://schemas.openxmlformats.org/officeDocument/2006/customXml" ds:itemID="{7FEA0324-74CB-4E11-A24D-EE3DF264393B}">
   <ds:schemaRefs>
     <ds:schemaRef ds:uri="http://schemas.microsoft.com/office/2006/metadata/contentType"/>
@@ -11069,14 +11098,6 @@
     <ds:schemaRef ds:uri="http://purl.org/dc/elements/1.1/"/>
     <ds:schemaRef ds:uri="http://purl.org/dc/terms/"/>
     <ds:schemaRef ds:uri="http://schemas.microsoft.com/internal/obd"/>
-  </ds:schemaRefs>
-</ds:datastoreItem>
-</file>
-
-<file path=customXml/itemProps2.xml><?xml version="1.0" encoding="utf-8"?>
-<ds:datastoreItem xmlns:ds="http://schemas.openxmlformats.org/officeDocument/2006/customXml" ds:itemID="{90619B12-AFF5-4C5C-937B-0A7AB1969000}">
-  <ds:schemaRefs>
-    <ds:schemaRef ds:uri="http://schemas.microsoft.com/sharepoint/v3/contenttype/forms"/>
   </ds:schemaRefs>
 </ds:datastoreItem>
 </file>
